--- a/JavaScript/Week10/Week10.pptx
+++ b/JavaScript/Week10/Week10.pptx
@@ -147,12 +147,48 @@
 </p:presentation>
 </file>
 
-<file path=ppt/revisionInfo.xml><?xml version="1.0" encoding="utf-8"?>
-<p1510:revInfo xmlns:a="http://schemas.openxmlformats.org/drawingml/2006/main" xmlns:r="http://schemas.openxmlformats.org/officeDocument/2006/relationships" xmlns:p1510="http://schemas.microsoft.com/office/powerpoint/2015/10/main">
-  <p1510:revLst>
-    <p1510:client id="{87040855-7500-A342-9663-84078D131C12}" v="5" dt="2024-11-14T15:45:32.437"/>
-  </p1510:revLst>
-</p1510:revInfo>
+<file path=ppt/changesInfos/changesInfo1.xml><?xml version="1.0" encoding="utf-8"?>
+<pc:chgInfo xmlns:a="http://schemas.openxmlformats.org/drawingml/2006/main" xmlns:r="http://schemas.openxmlformats.org/officeDocument/2006/relationships" xmlns:ac="http://schemas.microsoft.com/office/drawing/2013/main/command" xmlns:pc="http://schemas.microsoft.com/office/powerpoint/2013/main/command">
+  <pc:docChgLst>
+    <pc:chgData name="Noman  Atique" userId="aab35d70-e8e0-4a76-8862-eddb3a1d4775" providerId="ADAL" clId="{D4AAC077-1EEA-4817-98ED-55C003801FB8}"/>
+    <pc:docChg chg="custSel modSld">
+      <pc:chgData name="Noman  Atique" userId="aab35d70-e8e0-4a76-8862-eddb3a1d4775" providerId="ADAL" clId="{D4AAC077-1EEA-4817-98ED-55C003801FB8}" dt="2026-03-16T13:23:01.025" v="66" actId="20577"/>
+      <pc:docMkLst>
+        <pc:docMk/>
+      </pc:docMkLst>
+      <pc:sldChg chg="modSp mod">
+        <pc:chgData name="Noman  Atique" userId="aab35d70-e8e0-4a76-8862-eddb3a1d4775" providerId="ADAL" clId="{D4AAC077-1EEA-4817-98ED-55C003801FB8}" dt="2026-03-16T12:34:59.420" v="1" actId="13926"/>
+        <pc:sldMkLst>
+          <pc:docMk/>
+          <pc:sldMk cId="3548744079" sldId="263"/>
+        </pc:sldMkLst>
+        <pc:spChg chg="mod">
+          <ac:chgData name="Noman  Atique" userId="aab35d70-e8e0-4a76-8862-eddb3a1d4775" providerId="ADAL" clId="{D4AAC077-1EEA-4817-98ED-55C003801FB8}" dt="2026-03-16T12:34:59.420" v="1" actId="13926"/>
+          <ac:spMkLst>
+            <pc:docMk/>
+            <pc:sldMk cId="3548744079" sldId="263"/>
+            <ac:spMk id="3" creationId="{DF760530-83FD-9EDA-EDC2-1438F7761E26}"/>
+          </ac:spMkLst>
+        </pc:spChg>
+      </pc:sldChg>
+      <pc:sldChg chg="modSp mod">
+        <pc:chgData name="Noman  Atique" userId="aab35d70-e8e0-4a76-8862-eddb3a1d4775" providerId="ADAL" clId="{D4AAC077-1EEA-4817-98ED-55C003801FB8}" dt="2026-03-16T13:23:01.025" v="66" actId="20577"/>
+        <pc:sldMkLst>
+          <pc:docMk/>
+          <pc:sldMk cId="1085325407" sldId="267"/>
+        </pc:sldMkLst>
+        <pc:spChg chg="mod">
+          <ac:chgData name="Noman  Atique" userId="aab35d70-e8e0-4a76-8862-eddb3a1d4775" providerId="ADAL" clId="{D4AAC077-1EEA-4817-98ED-55C003801FB8}" dt="2026-03-16T13:23:01.025" v="66" actId="20577"/>
+          <ac:spMkLst>
+            <pc:docMk/>
+            <pc:sldMk cId="1085325407" sldId="267"/>
+            <ac:spMk id="3" creationId="{8A47A6F7-72E4-A786-7E14-02CBCCF338FF}"/>
+          </ac:spMkLst>
+        </pc:spChg>
+      </pc:sldChg>
+    </pc:docChg>
+  </pc:docChgLst>
+</pc:chgInfo>
 </file>
 
 <file path=ppt/slideLayouts/slideLayout1.xml><?xml version="1.0" encoding="utf-8"?>
@@ -284,7 +320,7 @@
           <a:p>
             <a:fld id="{F28A4246-F2A7-4220-A405-8A96DAE08D6A}" type="datetimeFigureOut">
               <a:rPr lang="en-US" smtClean="0"/>
-              <a:t>3/10/2026</a:t>
+              <a:t>3/16/2026</a:t>
             </a:fld>
             <a:endParaRPr lang="en-US"/>
           </a:p>
@@ -452,7 +488,7 @@
           <a:p>
             <a:fld id="{F28A4246-F2A7-4220-A405-8A96DAE08D6A}" type="datetimeFigureOut">
               <a:rPr lang="en-US" smtClean="0"/>
-              <a:t>3/10/2026</a:t>
+              <a:t>3/16/2026</a:t>
             </a:fld>
             <a:endParaRPr lang="en-US"/>
           </a:p>
@@ -630,7 +666,7 @@
           <a:p>
             <a:fld id="{F28A4246-F2A7-4220-A405-8A96DAE08D6A}" type="datetimeFigureOut">
               <a:rPr lang="en-US" smtClean="0"/>
-              <a:t>3/10/2026</a:t>
+              <a:t>3/16/2026</a:t>
             </a:fld>
             <a:endParaRPr lang="en-US"/>
           </a:p>
@@ -798,7 +834,7 @@
           <a:p>
             <a:fld id="{F28A4246-F2A7-4220-A405-8A96DAE08D6A}" type="datetimeFigureOut">
               <a:rPr lang="en-US" smtClean="0"/>
-              <a:t>3/10/2026</a:t>
+              <a:t>3/16/2026</a:t>
             </a:fld>
             <a:endParaRPr lang="en-US"/>
           </a:p>
@@ -1043,7 +1079,7 @@
           <a:p>
             <a:fld id="{F28A4246-F2A7-4220-A405-8A96DAE08D6A}" type="datetimeFigureOut">
               <a:rPr lang="en-US" smtClean="0"/>
-              <a:t>3/10/2026</a:t>
+              <a:t>3/16/2026</a:t>
             </a:fld>
             <a:endParaRPr lang="en-US"/>
           </a:p>
@@ -1272,7 +1308,7 @@
           <a:p>
             <a:fld id="{F28A4246-F2A7-4220-A405-8A96DAE08D6A}" type="datetimeFigureOut">
               <a:rPr lang="en-US" smtClean="0"/>
-              <a:t>3/10/2026</a:t>
+              <a:t>3/16/2026</a:t>
             </a:fld>
             <a:endParaRPr lang="en-US"/>
           </a:p>
@@ -1636,7 +1672,7 @@
           <a:p>
             <a:fld id="{F28A4246-F2A7-4220-A405-8A96DAE08D6A}" type="datetimeFigureOut">
               <a:rPr lang="en-US" smtClean="0"/>
-              <a:t>3/10/2026</a:t>
+              <a:t>3/16/2026</a:t>
             </a:fld>
             <a:endParaRPr lang="en-US"/>
           </a:p>
@@ -1753,7 +1789,7 @@
           <a:p>
             <a:fld id="{F28A4246-F2A7-4220-A405-8A96DAE08D6A}" type="datetimeFigureOut">
               <a:rPr lang="en-US" smtClean="0"/>
-              <a:t>3/10/2026</a:t>
+              <a:t>3/16/2026</a:t>
             </a:fld>
             <a:endParaRPr lang="en-US"/>
           </a:p>
@@ -1848,7 +1884,7 @@
           <a:p>
             <a:fld id="{F28A4246-F2A7-4220-A405-8A96DAE08D6A}" type="datetimeFigureOut">
               <a:rPr lang="en-US" smtClean="0"/>
-              <a:t>3/10/2026</a:t>
+              <a:t>3/16/2026</a:t>
             </a:fld>
             <a:endParaRPr lang="en-US"/>
           </a:p>
@@ -2123,7 +2159,7 @@
           <a:p>
             <a:fld id="{F28A4246-F2A7-4220-A405-8A96DAE08D6A}" type="datetimeFigureOut">
               <a:rPr lang="en-US" smtClean="0"/>
-              <a:t>3/10/2026</a:t>
+              <a:t>3/16/2026</a:t>
             </a:fld>
             <a:endParaRPr lang="en-US"/>
           </a:p>
@@ -2378,7 +2414,7 @@
           <a:p>
             <a:fld id="{F28A4246-F2A7-4220-A405-8A96DAE08D6A}" type="datetimeFigureOut">
               <a:rPr lang="en-US" smtClean="0"/>
-              <a:t>3/10/2026</a:t>
+              <a:t>3/16/2026</a:t>
             </a:fld>
             <a:endParaRPr lang="en-US"/>
           </a:p>
@@ -2589,7 +2625,7 @@
           <a:p>
             <a:fld id="{F28A4246-F2A7-4220-A405-8A96DAE08D6A}" type="datetimeFigureOut">
               <a:rPr lang="en-US" smtClean="0"/>
-              <a:t>3/10/2026</a:t>
+              <a:t>3/16/2026</a:t>
             </a:fld>
             <a:endParaRPr lang="en-US"/>
           </a:p>
@@ -3511,7 +3547,7 @@
         <p:spPr/>
         <p:txBody>
           <a:bodyPr>
-            <a:normAutofit lnSpcReduction="10000"/>
+            <a:normAutofit fontScale="92500" lnSpcReduction="20000"/>
           </a:bodyPr>
           <a:lstStyle/>
           <a:p>
@@ -3548,6 +3584,42 @@
           <a:p>
             <a:r>
               <a:rPr lang="en-US" dirty="0"/>
+              <a:t>l</a:t>
+            </a:r>
+            <a:r>
+              <a:rPr lang="en-US"/>
+              <a:t>et </a:t>
+            </a:r>
+            <a:r>
+              <a:rPr lang="en-US" dirty="0"/>
+              <a:t>title = </a:t>
+            </a:r>
+            <a:r>
+              <a:rPr lang="en-US" dirty="0" err="1"/>
+              <a:t>props.title</a:t>
+            </a:r>
+            <a:r>
+              <a:rPr lang="en-US" dirty="0"/>
+              <a:t>;</a:t>
+            </a:r>
+          </a:p>
+          <a:p>
+            <a:r>
+              <a:rPr lang="en-US" dirty="0"/>
+              <a:t>let text = </a:t>
+            </a:r>
+            <a:r>
+              <a:rPr lang="en-US" dirty="0" err="1"/>
+              <a:t>props.text</a:t>
+            </a:r>
+            <a:r>
+              <a:rPr lang="en-US" dirty="0"/>
+              <a:t>;</a:t>
+            </a:r>
+          </a:p>
+          <a:p>
+            <a:r>
+              <a:rPr lang="en-US" dirty="0"/>
               <a:t>let {title, text} = props;</a:t>
             </a:r>
           </a:p>
@@ -3570,15 +3642,27 @@
               <a:buNone/>
             </a:pPr>
             <a:r>
-              <a:rPr lang="en-US" dirty="0"/>
+              <a:rPr lang="en-US" dirty="0">
+                <a:solidFill>
+                  <a:srgbClr val="FFFF00"/>
+                </a:solidFill>
+              </a:rPr>
               <a:t>function Header({</a:t>
             </a:r>
             <a:r>
-              <a:rPr lang="en-US" dirty="0" err="1"/>
+              <a:rPr lang="en-US" dirty="0" err="1">
+                <a:solidFill>
+                  <a:srgbClr val="FFFF00"/>
+                </a:solidFill>
+              </a:rPr>
               <a:t>title,text</a:t>
             </a:r>
             <a:r>
-              <a:rPr lang="en-US" dirty="0"/>
+              <a:rPr lang="en-US" dirty="0">
+                <a:solidFill>
+                  <a:srgbClr val="FFFF00"/>
+                </a:solidFill>
+              </a:rPr>
               <a:t>})</a:t>
             </a:r>
           </a:p>
@@ -7719,6 +7803,9 @@
                     <a:lumMod val="50000"/>
                   </a:schemeClr>
                 </a:solidFill>
+                <a:highlight>
+                  <a:srgbClr val="FFFF00"/>
+                </a:highlight>
                 <a:sym typeface="Wingdings" panose="05000000000000000000" pitchFamily="2" charset="2"/>
               </a:rPr>
               <a:t>package.json</a:t>
@@ -7741,9 +7828,26 @@
                     <a:lumMod val="50000"/>
                   </a:schemeClr>
                 </a:solidFill>
+                <a:highlight>
+                  <a:srgbClr val="FFFF00"/>
+                </a:highlight>
                 <a:sym typeface="Wingdings" panose="05000000000000000000" pitchFamily="2" charset="2"/>
               </a:rPr>
               <a:t>npm</a:t>
+            </a:r>
+            <a:r>
+              <a:rPr lang="en-US" b="1" dirty="0">
+                <a:solidFill>
+                  <a:schemeClr val="accent6">
+                    <a:lumMod val="50000"/>
+                  </a:schemeClr>
+                </a:solidFill>
+                <a:highlight>
+                  <a:srgbClr val="FFFF00"/>
+                </a:highlight>
+                <a:sym typeface="Wingdings" panose="05000000000000000000" pitchFamily="2" charset="2"/>
+              </a:rPr>
+              <a:t> install</a:t>
             </a:r>
             <a:r>
               <a:rPr lang="en-US" b="1" dirty="0">
@@ -7754,7 +7858,7 @@
                 </a:solidFill>
                 <a:sym typeface="Wingdings" panose="05000000000000000000" pitchFamily="2" charset="2"/>
               </a:rPr>
-              <a:t> install” and will get the </a:t>
+              <a:t>” and will get the </a:t>
             </a:r>
             <a:r>
               <a:rPr lang="en-US" b="1" dirty="0" err="1">

--- a/JavaScript/Week10/Week10.pptx
+++ b/JavaScript/Week10/Week10.pptx
@@ -20,27 +20,28 @@
     <p:sldId id="267" r:id="rId14"/>
     <p:sldId id="268" r:id="rId15"/>
     <p:sldId id="269" r:id="rId16"/>
-    <p:sldId id="271" r:id="rId17"/>
-    <p:sldId id="272" r:id="rId18"/>
-    <p:sldId id="273" r:id="rId19"/>
-    <p:sldId id="275" r:id="rId20"/>
-    <p:sldId id="270" r:id="rId21"/>
-    <p:sldId id="274" r:id="rId22"/>
-    <p:sldId id="276" r:id="rId23"/>
-    <p:sldId id="277" r:id="rId24"/>
-    <p:sldId id="278" r:id="rId25"/>
-    <p:sldId id="280" r:id="rId26"/>
-    <p:sldId id="279" r:id="rId27"/>
-    <p:sldId id="281" r:id="rId28"/>
-    <p:sldId id="282" r:id="rId29"/>
-    <p:sldId id="283" r:id="rId30"/>
-    <p:sldId id="284" r:id="rId31"/>
-    <p:sldId id="285" r:id="rId32"/>
-    <p:sldId id="286" r:id="rId33"/>
-    <p:sldId id="287" r:id="rId34"/>
-    <p:sldId id="288" r:id="rId35"/>
-    <p:sldId id="289" r:id="rId36"/>
-    <p:sldId id="290" r:id="rId37"/>
+    <p:sldId id="292" r:id="rId17"/>
+    <p:sldId id="271" r:id="rId18"/>
+    <p:sldId id="272" r:id="rId19"/>
+    <p:sldId id="273" r:id="rId20"/>
+    <p:sldId id="275" r:id="rId21"/>
+    <p:sldId id="270" r:id="rId22"/>
+    <p:sldId id="274" r:id="rId23"/>
+    <p:sldId id="276" r:id="rId24"/>
+    <p:sldId id="277" r:id="rId25"/>
+    <p:sldId id="278" r:id="rId26"/>
+    <p:sldId id="280" r:id="rId27"/>
+    <p:sldId id="279" r:id="rId28"/>
+    <p:sldId id="281" r:id="rId29"/>
+    <p:sldId id="282" r:id="rId30"/>
+    <p:sldId id="283" r:id="rId31"/>
+    <p:sldId id="284" r:id="rId32"/>
+    <p:sldId id="285" r:id="rId33"/>
+    <p:sldId id="286" r:id="rId34"/>
+    <p:sldId id="287" r:id="rId35"/>
+    <p:sldId id="288" r:id="rId36"/>
+    <p:sldId id="289" r:id="rId37"/>
+    <p:sldId id="290" r:id="rId38"/>
   </p:sldIdLst>
   <p:sldSz cx="12192000" cy="6858000"/>
   <p:notesSz cx="6858000" cy="9144000"/>
@@ -151,8 +152,8 @@
 <pc:chgInfo xmlns:a="http://schemas.openxmlformats.org/drawingml/2006/main" xmlns:r="http://schemas.openxmlformats.org/officeDocument/2006/relationships" xmlns:ac="http://schemas.microsoft.com/office/drawing/2013/main/command" xmlns:pc="http://schemas.microsoft.com/office/powerpoint/2013/main/command">
   <pc:docChgLst>
     <pc:chgData name="Noman  Atique" userId="aab35d70-e8e0-4a76-8862-eddb3a1d4775" providerId="ADAL" clId="{D4AAC077-1EEA-4817-98ED-55C003801FB8}"/>
-    <pc:docChg chg="custSel modSld">
-      <pc:chgData name="Noman  Atique" userId="aab35d70-e8e0-4a76-8862-eddb3a1d4775" providerId="ADAL" clId="{D4AAC077-1EEA-4817-98ED-55C003801FB8}" dt="2026-03-16T13:23:01.025" v="66" actId="20577"/>
+    <pc:docChg chg="custSel addSld modSld">
+      <pc:chgData name="Noman  Atique" userId="aab35d70-e8e0-4a76-8862-eddb3a1d4775" providerId="ADAL" clId="{D4AAC077-1EEA-4817-98ED-55C003801FB8}" dt="2026-03-17T15:05:42.541" v="682" actId="207"/>
       <pc:docMkLst>
         <pc:docMk/>
       </pc:docMkLst>
@@ -183,6 +184,29 @@
             <pc:docMk/>
             <pc:sldMk cId="1085325407" sldId="267"/>
             <ac:spMk id="3" creationId="{8A47A6F7-72E4-A786-7E14-02CBCCF338FF}"/>
+          </ac:spMkLst>
+        </pc:spChg>
+      </pc:sldChg>
+      <pc:sldChg chg="modSp new mod">
+        <pc:chgData name="Noman  Atique" userId="aab35d70-e8e0-4a76-8862-eddb3a1d4775" providerId="ADAL" clId="{D4AAC077-1EEA-4817-98ED-55C003801FB8}" dt="2026-03-17T15:05:42.541" v="682" actId="207"/>
+        <pc:sldMkLst>
+          <pc:docMk/>
+          <pc:sldMk cId="3338331850" sldId="292"/>
+        </pc:sldMkLst>
+        <pc:spChg chg="mod">
+          <ac:chgData name="Noman  Atique" userId="aab35d70-e8e0-4a76-8862-eddb3a1d4775" providerId="ADAL" clId="{D4AAC077-1EEA-4817-98ED-55C003801FB8}" dt="2026-03-17T14:58:57.894" v="114" actId="20577"/>
+          <ac:spMkLst>
+            <pc:docMk/>
+            <pc:sldMk cId="3338331850" sldId="292"/>
+            <ac:spMk id="2" creationId="{03DA5995-8AA9-6C72-E5F4-F0F38890A792}"/>
+          </ac:spMkLst>
+        </pc:spChg>
+        <pc:spChg chg="mod">
+          <ac:chgData name="Noman  Atique" userId="aab35d70-e8e0-4a76-8862-eddb3a1d4775" providerId="ADAL" clId="{D4AAC077-1EEA-4817-98ED-55C003801FB8}" dt="2026-03-17T15:05:42.541" v="682" actId="207"/>
+          <ac:spMkLst>
+            <pc:docMk/>
+            <pc:sldMk cId="3338331850" sldId="292"/>
+            <ac:spMk id="3" creationId="{64B03C5B-7CA8-3A5E-E691-ABEBC46E48FE}"/>
           </ac:spMkLst>
         </pc:spChg>
       </pc:sldChg>
@@ -3584,15 +3608,7 @@
           <a:p>
             <a:r>
               <a:rPr lang="en-US" dirty="0"/>
-              <a:t>l</a:t>
-            </a:r>
-            <a:r>
-              <a:rPr lang="en-US"/>
-              <a:t>et </a:t>
-            </a:r>
-            <a:r>
-              <a:rPr lang="en-US" dirty="0"/>
-              <a:t>title = </a:t>
+              <a:t>let title = </a:t>
             </a:r>
             <a:r>
               <a:rPr lang="en-US" dirty="0" err="1"/>
@@ -3924,7 +3940,7 @@
           <p:cNvPr id="2" name="Title 1">
             <a:extLst>
               <a:ext uri="{FF2B5EF4-FFF2-40B4-BE49-F238E27FC236}">
-                <a16:creationId xmlns:a16="http://schemas.microsoft.com/office/drawing/2014/main" id="{D398DBE0-6933-B589-3B10-75AB7E49CA81}"/>
+                <a16:creationId xmlns:a16="http://schemas.microsoft.com/office/drawing/2014/main" id="{03DA5995-8AA9-6C72-E5F4-F0F38890A792}"/>
               </a:ext>
             </a:extLst>
           </p:cNvPr>
@@ -3941,8 +3957,16 @@
           <a:lstStyle/>
           <a:p>
             <a:r>
-              <a:rPr lang="en-US"/>
-              <a:t>State management in React!</a:t>
+              <a:rPr lang="en-US" dirty="0"/>
+              <a:t>Why to define the event in “</a:t>
+            </a:r>
+            <a:r>
+              <a:rPr lang="en-US" dirty="0" err="1"/>
+              <a:t>App.jsx</a:t>
+            </a:r>
+            <a:r>
+              <a:rPr lang="en-US" dirty="0"/>
+              <a:t>”?</a:t>
             </a:r>
           </a:p>
         </p:txBody>
@@ -3952,7 +3976,7 @@
           <p:cNvPr id="3" name="Content Placeholder 2">
             <a:extLst>
               <a:ext uri="{FF2B5EF4-FFF2-40B4-BE49-F238E27FC236}">
-                <a16:creationId xmlns:a16="http://schemas.microsoft.com/office/drawing/2014/main" id="{A94837B4-BEF3-229F-7C74-8B59A5E393DF}"/>
+                <a16:creationId xmlns:a16="http://schemas.microsoft.com/office/drawing/2014/main" id="{64B03C5B-7CA8-3A5E-E691-ABEBC46E48FE}"/>
               </a:ext>
             </a:extLst>
           </p:cNvPr>
@@ -3966,48 +3990,107 @@
         <p:spPr/>
         <p:txBody>
           <a:bodyPr>
-            <a:normAutofit lnSpcReduction="10000"/>
+            <a:normAutofit fontScale="92500"/>
           </a:bodyPr>
           <a:lstStyle/>
           <a:p>
             <a:r>
-              <a:rPr lang="en-CA"/>
-              <a:t>In React, </a:t>
-            </a:r>
-            <a:r>
-              <a:rPr lang="en-CA" b="1"/>
-              <a:t>state</a:t>
-            </a:r>
-            <a:r>
-              <a:rPr lang="en-CA"/>
-              <a:t> refers to an object that holds data or information about a component, determining how it renders and behaves.</a:t>
-            </a:r>
-          </a:p>
-          <a:p>
-            <a:endParaRPr lang="en-CA"/>
-          </a:p>
-          <a:p>
-            <a:r>
-              <a:rPr lang="en-CA"/>
-              <a:t>Each component can have its own state, which is stored internally and can be updated over time. </a:t>
-            </a:r>
-          </a:p>
-          <a:p>
-            <a:endParaRPr lang="en-CA"/>
-          </a:p>
-          <a:p>
-            <a:r>
-              <a:rPr lang="en-CA"/>
-              <a:t>State is essential for making React applications interactive and dynamic, as it allows components to respond to user inputs, changes in data, or other events by re-rendering the UI with new data. (Remember our balls project in vanilla JavaScript?)</a:t>
-            </a:r>
-            <a:endParaRPr lang="en-US"/>
+              <a:rPr lang="en-US" dirty="0"/>
+              <a:t>Actually we want most of the objects (functions, variables </a:t>
+            </a:r>
+            <a:r>
+              <a:rPr lang="en-US" dirty="0" err="1"/>
+              <a:t>etc</a:t>
+            </a:r>
+            <a:r>
+              <a:rPr lang="en-US" dirty="0"/>
+              <a:t>) to be </a:t>
+            </a:r>
+            <a:r>
+              <a:rPr lang="en-US" dirty="0">
+                <a:solidFill>
+                  <a:srgbClr val="FFFF00"/>
+                </a:solidFill>
+              </a:rPr>
+              <a:t>GLOBAL</a:t>
+            </a:r>
+            <a:r>
+              <a:rPr lang="en-US" dirty="0"/>
+              <a:t>. </a:t>
+            </a:r>
+          </a:p>
+          <a:p>
+            <a:endParaRPr lang="en-US" dirty="0"/>
+          </a:p>
+          <a:p>
+            <a:r>
+              <a:rPr lang="en-US" dirty="0"/>
+              <a:t>That is why we usually set them in </a:t>
+            </a:r>
+            <a:r>
+              <a:rPr lang="en-US" dirty="0" err="1"/>
+              <a:t>App.jsx</a:t>
+            </a:r>
+            <a:r>
+              <a:rPr lang="en-US" dirty="0"/>
+              <a:t> and then from there onwards we send them to respective components as “</a:t>
+            </a:r>
+            <a:r>
+              <a:rPr lang="en-US" dirty="0" err="1"/>
+              <a:t>props”,and</a:t>
+            </a:r>
+            <a:r>
+              <a:rPr lang="en-US" dirty="0"/>
+              <a:t> there we use them BUT they exist in </a:t>
+            </a:r>
+            <a:r>
+              <a:rPr lang="en-US" dirty="0" err="1"/>
+              <a:t>App.jsx</a:t>
+            </a:r>
+            <a:r>
+              <a:rPr lang="en-US" dirty="0"/>
+              <a:t>.</a:t>
+            </a:r>
+          </a:p>
+          <a:p>
+            <a:endParaRPr lang="en-US" dirty="0"/>
+          </a:p>
+          <a:p>
+            <a:r>
+              <a:rPr lang="en-US" dirty="0"/>
+              <a:t>“Context API” enables us NOT TO define EVERYTHING in app and then send it to the components, rather through redux, we can define the </a:t>
+            </a:r>
+            <a:r>
+              <a:rPr lang="en-US" dirty="0">
+                <a:solidFill>
+                  <a:srgbClr val="FFFF00"/>
+                </a:solidFill>
+              </a:rPr>
+              <a:t>respective events, variables and </a:t>
+            </a:r>
+            <a:r>
+              <a:rPr lang="en-US" dirty="0" err="1">
+                <a:solidFill>
+                  <a:srgbClr val="FFFF00"/>
+                </a:solidFill>
+              </a:rPr>
+              <a:t>etc</a:t>
+            </a:r>
+            <a:r>
+              <a:rPr lang="en-US" dirty="0">
+                <a:solidFill>
+                  <a:srgbClr val="FFFF00"/>
+                </a:solidFill>
+              </a:rPr>
+              <a:t> in THE COMPONENTS..</a:t>
+            </a:r>
           </a:p>
         </p:txBody>
       </p:sp>
     </p:spTree>
     <p:extLst>
       <p:ext uri="{BB962C8B-B14F-4D97-AF65-F5344CB8AC3E}">
-        <p14:creationId xmlns:p14="http://schemas.microsoft.com/office/powerpoint/2010/main" val="1655269223"/>
+        <p14:creationId xmlns:p14="http://schemas.microsoft.com/office/powerpoint/2010/main" val="3338331850"/>
       </p:ext>
     </p:extLst>
   </p:cSld>
@@ -4039,6 +4122,121 @@
           <p:cNvPr id="2" name="Title 1">
             <a:extLst>
               <a:ext uri="{FF2B5EF4-FFF2-40B4-BE49-F238E27FC236}">
+                <a16:creationId xmlns:a16="http://schemas.microsoft.com/office/drawing/2014/main" id="{D398DBE0-6933-B589-3B10-75AB7E49CA81}"/>
+              </a:ext>
+            </a:extLst>
+          </p:cNvPr>
+          <p:cNvSpPr>
+            <a:spLocks noGrp="1"/>
+          </p:cNvSpPr>
+          <p:nvPr>
+            <p:ph type="title"/>
+          </p:nvPr>
+        </p:nvSpPr>
+        <p:spPr/>
+        <p:txBody>
+          <a:bodyPr/>
+          <a:lstStyle/>
+          <a:p>
+            <a:r>
+              <a:rPr lang="en-US"/>
+              <a:t>State management in React!</a:t>
+            </a:r>
+          </a:p>
+        </p:txBody>
+      </p:sp>
+      <p:sp>
+        <p:nvSpPr>
+          <p:cNvPr id="3" name="Content Placeholder 2">
+            <a:extLst>
+              <a:ext uri="{FF2B5EF4-FFF2-40B4-BE49-F238E27FC236}">
+                <a16:creationId xmlns:a16="http://schemas.microsoft.com/office/drawing/2014/main" id="{A94837B4-BEF3-229F-7C74-8B59A5E393DF}"/>
+              </a:ext>
+            </a:extLst>
+          </p:cNvPr>
+          <p:cNvSpPr>
+            <a:spLocks noGrp="1"/>
+          </p:cNvSpPr>
+          <p:nvPr>
+            <p:ph idx="1"/>
+          </p:nvPr>
+        </p:nvSpPr>
+        <p:spPr/>
+        <p:txBody>
+          <a:bodyPr>
+            <a:normAutofit lnSpcReduction="10000"/>
+          </a:bodyPr>
+          <a:lstStyle/>
+          <a:p>
+            <a:r>
+              <a:rPr lang="en-CA"/>
+              <a:t>In React, </a:t>
+            </a:r>
+            <a:r>
+              <a:rPr lang="en-CA" b="1"/>
+              <a:t>state</a:t>
+            </a:r>
+            <a:r>
+              <a:rPr lang="en-CA"/>
+              <a:t> refers to an object that holds data or information about a component, determining how it renders and behaves.</a:t>
+            </a:r>
+          </a:p>
+          <a:p>
+            <a:endParaRPr lang="en-CA"/>
+          </a:p>
+          <a:p>
+            <a:r>
+              <a:rPr lang="en-CA"/>
+              <a:t>Each component can have its own state, which is stored internally and can be updated over time. </a:t>
+            </a:r>
+          </a:p>
+          <a:p>
+            <a:endParaRPr lang="en-CA"/>
+          </a:p>
+          <a:p>
+            <a:r>
+              <a:rPr lang="en-CA"/>
+              <a:t>State is essential for making React applications interactive and dynamic, as it allows components to respond to user inputs, changes in data, or other events by re-rendering the UI with new data. (Remember our balls project in vanilla JavaScript?)</a:t>
+            </a:r>
+            <a:endParaRPr lang="en-US"/>
+          </a:p>
+        </p:txBody>
+      </p:sp>
+    </p:spTree>
+    <p:extLst>
+      <p:ext uri="{BB962C8B-B14F-4D97-AF65-F5344CB8AC3E}">
+        <p14:creationId xmlns:p14="http://schemas.microsoft.com/office/powerpoint/2010/main" val="1655269223"/>
+      </p:ext>
+    </p:extLst>
+  </p:cSld>
+  <p:clrMapOvr>
+    <a:masterClrMapping/>
+  </p:clrMapOvr>
+</p:sld>
+</file>
+
+<file path=ppt/slides/slide18.xml><?xml version="1.0" encoding="utf-8"?>
+<p:sld xmlns:a="http://schemas.openxmlformats.org/drawingml/2006/main" xmlns:r="http://schemas.openxmlformats.org/officeDocument/2006/relationships" xmlns:p="http://schemas.openxmlformats.org/presentationml/2006/main">
+  <p:cSld>
+    <p:spTree>
+      <p:nvGrpSpPr>
+        <p:cNvPr id="1" name=""/>
+        <p:cNvGrpSpPr/>
+        <p:nvPr/>
+      </p:nvGrpSpPr>
+      <p:grpSpPr>
+        <a:xfrm>
+          <a:off x="0" y="0"/>
+          <a:ext cx="0" cy="0"/>
+          <a:chOff x="0" y="0"/>
+          <a:chExt cx="0" cy="0"/>
+        </a:xfrm>
+      </p:grpSpPr>
+      <p:sp>
+        <p:nvSpPr>
+          <p:cNvPr id="2" name="Title 1">
+            <a:extLst>
+              <a:ext uri="{FF2B5EF4-FFF2-40B4-BE49-F238E27FC236}">
                 <a16:creationId xmlns:a16="http://schemas.microsoft.com/office/drawing/2014/main" id="{30D0C2E2-12DF-A379-6CDD-CD87F9C3494C}"/>
               </a:ext>
             </a:extLst>
@@ -4156,7 +4354,7 @@
 </p:sld>
 </file>
 
-<file path=ppt/slides/slide18.xml><?xml version="1.0" encoding="utf-8"?>
+<file path=ppt/slides/slide19.xml><?xml version="1.0" encoding="utf-8"?>
 <p:sld xmlns:a="http://schemas.openxmlformats.org/drawingml/2006/main" xmlns:r="http://schemas.openxmlformats.org/officeDocument/2006/relationships" xmlns:p="http://schemas.openxmlformats.org/presentationml/2006/main">
   <p:cSld>
     <p:spTree>
@@ -4246,110 +4444,6 @@
 </p:sld>
 </file>
 
-<file path=ppt/slides/slide19.xml><?xml version="1.0" encoding="utf-8"?>
-<p:sld xmlns:a="http://schemas.openxmlformats.org/drawingml/2006/main" xmlns:r="http://schemas.openxmlformats.org/officeDocument/2006/relationships" xmlns:p="http://schemas.openxmlformats.org/presentationml/2006/main">
-  <p:cSld>
-    <p:spTree>
-      <p:nvGrpSpPr>
-        <p:cNvPr id="1" name=""/>
-        <p:cNvGrpSpPr/>
-        <p:nvPr/>
-      </p:nvGrpSpPr>
-      <p:grpSpPr>
-        <a:xfrm>
-          <a:off x="0" y="0"/>
-          <a:ext cx="0" cy="0"/>
-          <a:chOff x="0" y="0"/>
-          <a:chExt cx="0" cy="0"/>
-        </a:xfrm>
-      </p:grpSpPr>
-      <p:sp>
-        <p:nvSpPr>
-          <p:cNvPr id="2" name="Title 1">
-            <a:extLst>
-              <a:ext uri="{FF2B5EF4-FFF2-40B4-BE49-F238E27FC236}">
-                <a16:creationId xmlns:a16="http://schemas.microsoft.com/office/drawing/2014/main" id="{D4188004-448B-6846-F66E-D87AF9619DBE}"/>
-              </a:ext>
-            </a:extLst>
-          </p:cNvPr>
-          <p:cNvSpPr>
-            <a:spLocks noGrp="1"/>
-          </p:cNvSpPr>
-          <p:nvPr>
-            <p:ph type="title"/>
-          </p:nvPr>
-        </p:nvSpPr>
-        <p:spPr/>
-        <p:txBody>
-          <a:bodyPr/>
-          <a:lstStyle/>
-          <a:p>
-            <a:r>
-              <a:rPr lang="en-US"/>
-              <a:t>How state Differs from Props</a:t>
-            </a:r>
-          </a:p>
-        </p:txBody>
-      </p:sp>
-      <p:sp>
-        <p:nvSpPr>
-          <p:cNvPr id="3" name="Content Placeholder 2">
-            <a:extLst>
-              <a:ext uri="{FF2B5EF4-FFF2-40B4-BE49-F238E27FC236}">
-                <a16:creationId xmlns:a16="http://schemas.microsoft.com/office/drawing/2014/main" id="{846789A7-67C1-B1E0-6FC0-406269BD8AFE}"/>
-              </a:ext>
-            </a:extLst>
-          </p:cNvPr>
-          <p:cNvSpPr>
-            <a:spLocks noGrp="1"/>
-          </p:cNvSpPr>
-          <p:nvPr>
-            <p:ph idx="1"/>
-          </p:nvPr>
-        </p:nvSpPr>
-        <p:spPr/>
-        <p:txBody>
-          <a:bodyPr/>
-          <a:lstStyle/>
-          <a:p>
-            <a:r>
-              <a:rPr lang="en-CA" b="1"/>
-              <a:t>State</a:t>
-            </a:r>
-            <a:r>
-              <a:rPr lang="en-CA"/>
-              <a:t>: Internal to the component and can be modified by the component itself.[Global variable]</a:t>
-            </a:r>
-          </a:p>
-          <a:p>
-            <a:endParaRPr lang="en-CA" b="1"/>
-          </a:p>
-          <a:p>
-            <a:r>
-              <a:rPr lang="en-CA" b="1"/>
-              <a:t>Props</a:t>
-            </a:r>
-            <a:r>
-              <a:rPr lang="en-CA"/>
-              <a:t>: Passed down from parent components and cannot be modified by the child component.[Local variable]</a:t>
-            </a:r>
-            <a:endParaRPr lang="en-US"/>
-          </a:p>
-        </p:txBody>
-      </p:sp>
-    </p:spTree>
-    <p:extLst>
-      <p:ext uri="{BB962C8B-B14F-4D97-AF65-F5344CB8AC3E}">
-        <p14:creationId xmlns:p14="http://schemas.microsoft.com/office/powerpoint/2010/main" val="1960870828"/>
-      </p:ext>
-    </p:extLst>
-  </p:cSld>
-  <p:clrMapOvr>
-    <a:masterClrMapping/>
-  </p:clrMapOvr>
-</p:sld>
-</file>
-
 <file path=ppt/slides/slide2.xml><?xml version="1.0" encoding="utf-8"?>
 <p:sld xmlns:a="http://schemas.openxmlformats.org/drawingml/2006/main" xmlns:r="http://schemas.openxmlformats.org/officeDocument/2006/relationships" xmlns:p="http://schemas.openxmlformats.org/presentationml/2006/main">
   <p:cSld>
@@ -4561,7 +4655,7 @@
           <p:cNvPr id="2" name="Title 1">
             <a:extLst>
               <a:ext uri="{FF2B5EF4-FFF2-40B4-BE49-F238E27FC236}">
-                <a16:creationId xmlns:a16="http://schemas.microsoft.com/office/drawing/2014/main" id="{DC86D391-40B5-1847-CB50-A8F3B28F04D2}"/>
+                <a16:creationId xmlns:a16="http://schemas.microsoft.com/office/drawing/2014/main" id="{D4188004-448B-6846-F66E-D87AF9619DBE}"/>
               </a:ext>
             </a:extLst>
           </p:cNvPr>
@@ -4579,7 +4673,7 @@
           <a:p>
             <a:r>
               <a:rPr lang="en-US"/>
-              <a:t>Hooks	</a:t>
+              <a:t>How state Differs from Props</a:t>
             </a:r>
           </a:p>
         </p:txBody>
@@ -4589,7 +4683,7 @@
           <p:cNvPr id="3" name="Content Placeholder 2">
             <a:extLst>
               <a:ext uri="{FF2B5EF4-FFF2-40B4-BE49-F238E27FC236}">
-                <a16:creationId xmlns:a16="http://schemas.microsoft.com/office/drawing/2014/main" id="{8D20C242-5C07-84F5-CFE8-DB094A62E64A}"/>
+                <a16:creationId xmlns:a16="http://schemas.microsoft.com/office/drawing/2014/main" id="{846789A7-67C1-B1E0-6FC0-406269BD8AFE}"/>
               </a:ext>
             </a:extLst>
           </p:cNvPr>
@@ -4602,32 +4696,29 @@
         </p:nvSpPr>
         <p:spPr/>
         <p:txBody>
-          <a:bodyPr>
-            <a:normAutofit lnSpcReduction="10000"/>
-          </a:bodyPr>
-          <a:lstStyle/>
-          <a:p>
+          <a:bodyPr/>
+          <a:lstStyle/>
+          <a:p>
+            <a:r>
+              <a:rPr lang="en-CA" b="1"/>
+              <a:t>State</a:t>
+            </a:r>
             <a:r>
               <a:rPr lang="en-CA"/>
-              <a:t>React Hooks are special functions that allow components to access features like state management and lifecycle events. </a:t>
-            </a:r>
-          </a:p>
-          <a:p>
-            <a:endParaRPr lang="en-CA"/>
-          </a:p>
-          <a:p>
+              <a:t>: Internal to the component and can be modified by the component itself.[Global variable]</a:t>
+            </a:r>
+          </a:p>
+          <a:p>
+            <a:endParaRPr lang="en-CA" b="1"/>
+          </a:p>
+          <a:p>
+            <a:r>
+              <a:rPr lang="en-CA" b="1"/>
+              <a:t>Props</a:t>
+            </a:r>
             <a:r>
               <a:rPr lang="en-CA"/>
-              <a:t>They let you use state and other React functionalities directly within functional components, enhancing functionality and enabling component-level logic to be shared and reused. </a:t>
-            </a:r>
-          </a:p>
-          <a:p>
-            <a:endParaRPr lang="en-CA"/>
-          </a:p>
-          <a:p>
-            <a:r>
-              <a:rPr lang="en-CA"/>
-              <a:t>Hooks are a foundational aspect of React, bringing stateful behavior and lifecycle capabilities to functional components, which were previously limited to class components.</a:t>
+              <a:t>: Passed down from parent components and cannot be modified by the child component.[Local variable]</a:t>
             </a:r>
             <a:endParaRPr lang="en-US"/>
           </a:p>
@@ -4636,7 +4727,7 @@
     </p:spTree>
     <p:extLst>
       <p:ext uri="{BB962C8B-B14F-4D97-AF65-F5344CB8AC3E}">
-        <p14:creationId xmlns:p14="http://schemas.microsoft.com/office/powerpoint/2010/main" val="701158134"/>
+        <p14:creationId xmlns:p14="http://schemas.microsoft.com/office/powerpoint/2010/main" val="1960870828"/>
       </p:ext>
     </p:extLst>
   </p:cSld>
@@ -4668,7 +4759,7 @@
           <p:cNvPr id="2" name="Title 1">
             <a:extLst>
               <a:ext uri="{FF2B5EF4-FFF2-40B4-BE49-F238E27FC236}">
-                <a16:creationId xmlns:a16="http://schemas.microsoft.com/office/drawing/2014/main" id="{5228685C-2A9B-4387-445B-0E6D31EDE580}"/>
+                <a16:creationId xmlns:a16="http://schemas.microsoft.com/office/drawing/2014/main" id="{DC86D391-40B5-1847-CB50-A8F3B28F04D2}"/>
               </a:ext>
             </a:extLst>
           </p:cNvPr>
@@ -4685,12 +4776,8 @@
           <a:lstStyle/>
           <a:p>
             <a:r>
-              <a:rPr lang="en-US" err="1"/>
-              <a:t>useState</a:t>
-            </a:r>
-            <a:r>
-              <a:rPr lang="en-US"/>
-              <a:t>( ) Hook:</a:t>
+              <a:rPr lang="en-US"/>
+              <a:t>Hooks	</a:t>
             </a:r>
           </a:p>
         </p:txBody>
@@ -4700,7 +4787,7 @@
           <p:cNvPr id="3" name="Content Placeholder 2">
             <a:extLst>
               <a:ext uri="{FF2B5EF4-FFF2-40B4-BE49-F238E27FC236}">
-                <a16:creationId xmlns:a16="http://schemas.microsoft.com/office/drawing/2014/main" id="{8BA9FF74-5047-DDF0-D79C-3AB86BE6B078}"/>
+                <a16:creationId xmlns:a16="http://schemas.microsoft.com/office/drawing/2014/main" id="{8D20C242-5C07-84F5-CFE8-DB094A62E64A}"/>
               </a:ext>
             </a:extLst>
           </p:cNvPr>
@@ -4713,20 +4800,23 @@
         </p:nvSpPr>
         <p:spPr/>
         <p:txBody>
-          <a:bodyPr/>
+          <a:bodyPr>
+            <a:normAutofit lnSpcReduction="10000"/>
+          </a:bodyPr>
           <a:lstStyle/>
           <a:p>
             <a:r>
               <a:rPr lang="en-CA"/>
-              <a:t>The </a:t>
-            </a:r>
-            <a:r>
-              <a:rPr lang="en-CA" err="1"/>
-              <a:t>useState</a:t>
-            </a:r>
+              <a:t>React Hooks are special functions that allow components to access features like state management and lifecycle events. </a:t>
+            </a:r>
+          </a:p>
+          <a:p>
+            <a:endParaRPr lang="en-CA"/>
+          </a:p>
+          <a:p>
             <a:r>
               <a:rPr lang="en-CA"/>
-              <a:t> Hook in React is a fundamental Hook that lets you add state to functional components. </a:t>
+              <a:t>They let you use state and other React functionalities directly within functional components, enhancing functionality and enabling component-level logic to be shared and reused. </a:t>
             </a:r>
           </a:p>
           <a:p>
@@ -4735,10 +4825,8 @@
           <a:p>
             <a:r>
               <a:rPr lang="en-CA"/>
-              <a:t>It allows you to declare a state variable and a function to update that state, enabling your component to manage and respond to data changes.</a:t>
-            </a:r>
-          </a:p>
-          <a:p>
+              <a:t>Hooks are a foundational aspect of React, bringing stateful behavior and lifecycle capabilities to functional components, which were previously limited to class components.</a:t>
+            </a:r>
             <a:endParaRPr lang="en-US"/>
           </a:p>
         </p:txBody>
@@ -4746,7 +4834,7 @@
     </p:spTree>
     <p:extLst>
       <p:ext uri="{BB962C8B-B14F-4D97-AF65-F5344CB8AC3E}">
-        <p14:creationId xmlns:p14="http://schemas.microsoft.com/office/powerpoint/2010/main" val="2967534320"/>
+        <p14:creationId xmlns:p14="http://schemas.microsoft.com/office/powerpoint/2010/main" val="701158134"/>
       </p:ext>
     </p:extLst>
   </p:cSld>
@@ -4778,6 +4866,116 @@
           <p:cNvPr id="2" name="Title 1">
             <a:extLst>
               <a:ext uri="{FF2B5EF4-FFF2-40B4-BE49-F238E27FC236}">
+                <a16:creationId xmlns:a16="http://schemas.microsoft.com/office/drawing/2014/main" id="{5228685C-2A9B-4387-445B-0E6D31EDE580}"/>
+              </a:ext>
+            </a:extLst>
+          </p:cNvPr>
+          <p:cNvSpPr>
+            <a:spLocks noGrp="1"/>
+          </p:cNvSpPr>
+          <p:nvPr>
+            <p:ph type="title"/>
+          </p:nvPr>
+        </p:nvSpPr>
+        <p:spPr/>
+        <p:txBody>
+          <a:bodyPr/>
+          <a:lstStyle/>
+          <a:p>
+            <a:r>
+              <a:rPr lang="en-US" err="1"/>
+              <a:t>useState</a:t>
+            </a:r>
+            <a:r>
+              <a:rPr lang="en-US"/>
+              <a:t>( ) Hook:</a:t>
+            </a:r>
+          </a:p>
+        </p:txBody>
+      </p:sp>
+      <p:sp>
+        <p:nvSpPr>
+          <p:cNvPr id="3" name="Content Placeholder 2">
+            <a:extLst>
+              <a:ext uri="{FF2B5EF4-FFF2-40B4-BE49-F238E27FC236}">
+                <a16:creationId xmlns:a16="http://schemas.microsoft.com/office/drawing/2014/main" id="{8BA9FF74-5047-DDF0-D79C-3AB86BE6B078}"/>
+              </a:ext>
+            </a:extLst>
+          </p:cNvPr>
+          <p:cNvSpPr>
+            <a:spLocks noGrp="1"/>
+          </p:cNvSpPr>
+          <p:nvPr>
+            <p:ph idx="1"/>
+          </p:nvPr>
+        </p:nvSpPr>
+        <p:spPr/>
+        <p:txBody>
+          <a:bodyPr/>
+          <a:lstStyle/>
+          <a:p>
+            <a:r>
+              <a:rPr lang="en-CA"/>
+              <a:t>The </a:t>
+            </a:r>
+            <a:r>
+              <a:rPr lang="en-CA" err="1"/>
+              <a:t>useState</a:t>
+            </a:r>
+            <a:r>
+              <a:rPr lang="en-CA"/>
+              <a:t> Hook in React is a fundamental Hook that lets you add state to functional components. </a:t>
+            </a:r>
+          </a:p>
+          <a:p>
+            <a:endParaRPr lang="en-CA"/>
+          </a:p>
+          <a:p>
+            <a:r>
+              <a:rPr lang="en-CA"/>
+              <a:t>It allows you to declare a state variable and a function to update that state, enabling your component to manage and respond to data changes.</a:t>
+            </a:r>
+          </a:p>
+          <a:p>
+            <a:endParaRPr lang="en-US"/>
+          </a:p>
+        </p:txBody>
+      </p:sp>
+    </p:spTree>
+    <p:extLst>
+      <p:ext uri="{BB962C8B-B14F-4D97-AF65-F5344CB8AC3E}">
+        <p14:creationId xmlns:p14="http://schemas.microsoft.com/office/powerpoint/2010/main" val="2967534320"/>
+      </p:ext>
+    </p:extLst>
+  </p:cSld>
+  <p:clrMapOvr>
+    <a:masterClrMapping/>
+  </p:clrMapOvr>
+</p:sld>
+</file>
+
+<file path=ppt/slides/slide23.xml><?xml version="1.0" encoding="utf-8"?>
+<p:sld xmlns:a="http://schemas.openxmlformats.org/drawingml/2006/main" xmlns:r="http://schemas.openxmlformats.org/officeDocument/2006/relationships" xmlns:p="http://schemas.openxmlformats.org/presentationml/2006/main">
+  <p:cSld>
+    <p:spTree>
+      <p:nvGrpSpPr>
+        <p:cNvPr id="1" name=""/>
+        <p:cNvGrpSpPr/>
+        <p:nvPr/>
+      </p:nvGrpSpPr>
+      <p:grpSpPr>
+        <a:xfrm>
+          <a:off x="0" y="0"/>
+          <a:ext cx="0" cy="0"/>
+          <a:chOff x="0" y="0"/>
+          <a:chExt cx="0" cy="0"/>
+        </a:xfrm>
+      </p:grpSpPr>
+      <p:sp>
+        <p:nvSpPr>
+          <p:cNvPr id="2" name="Title 1">
+            <a:extLst>
+              <a:ext uri="{FF2B5EF4-FFF2-40B4-BE49-F238E27FC236}">
                 <a16:creationId xmlns:a16="http://schemas.microsoft.com/office/drawing/2014/main" id="{989D3EF1-3CF2-5908-7909-6C0049C7AD71}"/>
               </a:ext>
             </a:extLst>
@@ -4923,7 +5121,7 @@
 </p:sld>
 </file>
 
-<file path=ppt/slides/slide23.xml><?xml version="1.0" encoding="utf-8"?>
+<file path=ppt/slides/slide24.xml><?xml version="1.0" encoding="utf-8"?>
 <p:sld xmlns:a="http://schemas.openxmlformats.org/drawingml/2006/main" xmlns:r="http://schemas.openxmlformats.org/officeDocument/2006/relationships" xmlns:p="http://schemas.openxmlformats.org/presentationml/2006/main">
   <p:cSld>
     <p:spTree>
@@ -5013,150 +5211,6 @@
 </p:sld>
 </file>
 
-<file path=ppt/slides/slide24.xml><?xml version="1.0" encoding="utf-8"?>
-<p:sld xmlns:a="http://schemas.openxmlformats.org/drawingml/2006/main" xmlns:r="http://schemas.openxmlformats.org/officeDocument/2006/relationships" xmlns:p="http://schemas.openxmlformats.org/presentationml/2006/main">
-  <p:cSld>
-    <p:spTree>
-      <p:nvGrpSpPr>
-        <p:cNvPr id="1" name=""/>
-        <p:cNvGrpSpPr/>
-        <p:nvPr/>
-      </p:nvGrpSpPr>
-      <p:grpSpPr>
-        <a:xfrm>
-          <a:off x="0" y="0"/>
-          <a:ext cx="0" cy="0"/>
-          <a:chOff x="0" y="0"/>
-          <a:chExt cx="0" cy="0"/>
-        </a:xfrm>
-      </p:grpSpPr>
-      <p:sp>
-        <p:nvSpPr>
-          <p:cNvPr id="2" name="Title 1">
-            <a:extLst>
-              <a:ext uri="{FF2B5EF4-FFF2-40B4-BE49-F238E27FC236}">
-                <a16:creationId xmlns:a16="http://schemas.microsoft.com/office/drawing/2014/main" id="{061A7482-A948-F8D5-2A9C-72A81D873131}"/>
-              </a:ext>
-            </a:extLst>
-          </p:cNvPr>
-          <p:cNvSpPr>
-            <a:spLocks noGrp="1"/>
-          </p:cNvSpPr>
-          <p:nvPr>
-            <p:ph type="title"/>
-          </p:nvPr>
-        </p:nvSpPr>
-        <p:spPr/>
-        <p:txBody>
-          <a:bodyPr/>
-          <a:lstStyle/>
-          <a:p>
-            <a:r>
-              <a:rPr lang="en-US"/>
-              <a:t>Example explained..</a:t>
-            </a:r>
-          </a:p>
-        </p:txBody>
-      </p:sp>
-      <p:sp>
-        <p:nvSpPr>
-          <p:cNvPr id="3" name="Content Placeholder 2">
-            <a:extLst>
-              <a:ext uri="{FF2B5EF4-FFF2-40B4-BE49-F238E27FC236}">
-                <a16:creationId xmlns:a16="http://schemas.microsoft.com/office/drawing/2014/main" id="{88BCB3EE-693F-FB98-E138-67F9256A8A9B}"/>
-              </a:ext>
-            </a:extLst>
-          </p:cNvPr>
-          <p:cNvSpPr>
-            <a:spLocks noGrp="1"/>
-          </p:cNvSpPr>
-          <p:nvPr>
-            <p:ph idx="1"/>
-          </p:nvPr>
-        </p:nvSpPr>
-        <p:spPr/>
-        <p:txBody>
-          <a:bodyPr/>
-          <a:lstStyle/>
-          <a:p>
-            <a:pPr marL="0" indent="0">
-              <a:buNone/>
-            </a:pPr>
-            <a:r>
-              <a:rPr lang="en-CA"/>
-              <a:t>We initialize count to 0 by passing 0 to </a:t>
-            </a:r>
-            <a:r>
-              <a:rPr lang="en-CA" err="1"/>
-              <a:t>useState</a:t>
-            </a:r>
-            <a:r>
-              <a:rPr lang="en-CA"/>
-              <a:t>.</a:t>
-            </a:r>
-          </a:p>
-          <a:p>
-            <a:pPr marL="0" indent="0">
-              <a:buNone/>
-            </a:pPr>
-            <a:endParaRPr lang="en-CA"/>
-          </a:p>
-          <a:p>
-            <a:pPr marL="0" indent="0">
-              <a:buNone/>
-            </a:pPr>
-            <a:r>
-              <a:rPr lang="en-CA"/>
-              <a:t>The </a:t>
-            </a:r>
-            <a:r>
-              <a:rPr lang="en-CA" err="1"/>
-              <a:t>setCount</a:t>
-            </a:r>
-            <a:r>
-              <a:rPr lang="en-CA"/>
-              <a:t> function is used to update count whenever the button is clicked.</a:t>
-            </a:r>
-          </a:p>
-          <a:p>
-            <a:pPr marL="0" indent="0">
-              <a:buNone/>
-            </a:pPr>
-            <a:endParaRPr lang="en-CA"/>
-          </a:p>
-          <a:p>
-            <a:pPr marL="0" indent="0">
-              <a:buNone/>
-            </a:pPr>
-            <a:r>
-              <a:rPr lang="en-CA"/>
-              <a:t>Each time </a:t>
-            </a:r>
-            <a:r>
-              <a:rPr lang="en-CA" err="1"/>
-              <a:t>setCount</a:t>
-            </a:r>
-            <a:r>
-              <a:rPr lang="en-CA"/>
-              <a:t> is called, React re-renders the component with the updated count value.</a:t>
-            </a:r>
-            <a:endParaRPr lang="en-US"/>
-          </a:p>
-        </p:txBody>
-      </p:sp>
-    </p:spTree>
-    <p:extLst>
-      <p:ext uri="{BB962C8B-B14F-4D97-AF65-F5344CB8AC3E}">
-        <p14:creationId xmlns:p14="http://schemas.microsoft.com/office/powerpoint/2010/main" val="3964123086"/>
-      </p:ext>
-    </p:extLst>
-  </p:cSld>
-  <p:clrMapOvr>
-    <a:masterClrMapping/>
-  </p:clrMapOvr>
-</p:sld>
-</file>
-
 <file path=ppt/slides/slide25.xml><?xml version="1.0" encoding="utf-8"?>
 <p:sld xmlns:a="http://schemas.openxmlformats.org/drawingml/2006/main" xmlns:r="http://schemas.openxmlformats.org/officeDocument/2006/relationships" xmlns:p="http://schemas.openxmlformats.org/presentationml/2006/main">
   <p:cSld>
@@ -5179,7 +5233,7 @@
           <p:cNvPr id="2" name="Title 1">
             <a:extLst>
               <a:ext uri="{FF2B5EF4-FFF2-40B4-BE49-F238E27FC236}">
-                <a16:creationId xmlns:a16="http://schemas.microsoft.com/office/drawing/2014/main" id="{1832481F-1DA9-CFA6-A70D-10112A748E42}"/>
+                <a16:creationId xmlns:a16="http://schemas.microsoft.com/office/drawing/2014/main" id="{061A7482-A948-F8D5-2A9C-72A81D873131}"/>
               </a:ext>
             </a:extLst>
           </p:cNvPr>
@@ -5197,7 +5251,7 @@
           <a:p>
             <a:r>
               <a:rPr lang="en-US"/>
-              <a:t>Key points here..</a:t>
+              <a:t>Example explained..</a:t>
             </a:r>
           </a:p>
         </p:txBody>
@@ -5207,7 +5261,7 @@
           <p:cNvPr id="3" name="Content Placeholder 2">
             <a:extLst>
               <a:ext uri="{FF2B5EF4-FFF2-40B4-BE49-F238E27FC236}">
-                <a16:creationId xmlns:a16="http://schemas.microsoft.com/office/drawing/2014/main" id="{51D13115-D45C-E185-22D0-3234E8DBB11F}"/>
+                <a16:creationId xmlns:a16="http://schemas.microsoft.com/office/drawing/2014/main" id="{88BCB3EE-693F-FB98-E138-67F9256A8A9B}"/>
               </a:ext>
             </a:extLst>
           </p:cNvPr>
@@ -5220,75 +5274,70 @@
         </p:nvSpPr>
         <p:spPr/>
         <p:txBody>
-          <a:bodyPr>
-            <a:normAutofit lnSpcReduction="10000"/>
-          </a:bodyPr>
-          <a:lstStyle/>
-          <a:p>
-            <a:pPr>
-              <a:buFont typeface="Arial" panose="020B0604020202020204" pitchFamily="34" charset="0"/>
-              <a:buChar char="•"/>
+          <a:bodyPr/>
+          <a:lstStyle/>
+          <a:p>
+            <a:pPr marL="0" indent="0">
+              <a:buNone/>
             </a:pPr>
             <a:r>
-              <a:rPr lang="en-CA" b="1"/>
-              <a:t>State Preservation</a:t>
-            </a:r>
-            <a:r>
               <a:rPr lang="en-CA"/>
-              <a:t>: State persists across re-renders, so changes to count or user values are retained as the component re-renders.</a:t>
-            </a:r>
-          </a:p>
-          <a:p>
-            <a:pPr>
-              <a:buFont typeface="Arial" panose="020B0604020202020204" pitchFamily="34" charset="0"/>
-              <a:buChar char="•"/>
+              <a:t>We initialize count to 0 by passing 0 to </a:t>
+            </a:r>
+            <a:r>
+              <a:rPr lang="en-CA" err="1"/>
+              <a:t>useState</a:t>
+            </a:r>
+            <a:r>
+              <a:rPr lang="en-CA"/>
+              <a:t>.</a:t>
+            </a:r>
+          </a:p>
+          <a:p>
+            <a:pPr marL="0" indent="0">
+              <a:buNone/>
             </a:pPr>
             <a:endParaRPr lang="en-CA"/>
           </a:p>
           <a:p>
-            <a:pPr>
-              <a:buFont typeface="Arial" panose="020B0604020202020204" pitchFamily="34" charset="0"/>
-              <a:buChar char="•"/>
+            <a:pPr marL="0" indent="0">
+              <a:buNone/>
             </a:pPr>
             <a:r>
-              <a:rPr lang="en-CA" b="1"/>
-              <a:t>Asynchronous Updates</a:t>
-            </a:r>
-            <a:r>
               <a:rPr lang="en-CA"/>
-              <a:t>: Calling </a:t>
+              <a:t>The </a:t>
             </a:r>
             <a:r>
               <a:rPr lang="en-CA" err="1"/>
-              <a:t>setState</a:t>
+              <a:t>setCount</a:t>
             </a:r>
             <a:r>
               <a:rPr lang="en-CA"/>
-              <a:t> triggers a re-render asynchronously, so multiple state updates may be batched together.</a:t>
-            </a:r>
-          </a:p>
-          <a:p>
-            <a:pPr>
-              <a:buFont typeface="Arial" panose="020B0604020202020204" pitchFamily="34" charset="0"/>
-              <a:buChar char="•"/>
+              <a:t> function is used to update count whenever the button is clicked.</a:t>
+            </a:r>
+          </a:p>
+          <a:p>
+            <a:pPr marL="0" indent="0">
+              <a:buNone/>
             </a:pPr>
             <a:endParaRPr lang="en-CA"/>
           </a:p>
           <a:p>
+            <a:pPr marL="0" indent="0">
+              <a:buNone/>
+            </a:pPr>
             <a:r>
               <a:rPr lang="en-CA"/>
-              <a:t>The </a:t>
+              <a:t>Each time </a:t>
             </a:r>
             <a:r>
               <a:rPr lang="en-CA" err="1"/>
-              <a:t>useState</a:t>
+              <a:t>setCount</a:t>
             </a:r>
             <a:r>
               <a:rPr lang="en-CA"/>
-              <a:t> Hook is essential for making functional components stateful and interactive, making it easier to handle dynamic data and UI changes in React.</a:t>
-            </a:r>
-          </a:p>
-          <a:p>
+              <a:t> is called, React re-renders the component with the updated count value.</a:t>
+            </a:r>
             <a:endParaRPr lang="en-US"/>
           </a:p>
         </p:txBody>
@@ -5296,7 +5345,7 @@
     </p:spTree>
     <p:extLst>
       <p:ext uri="{BB962C8B-B14F-4D97-AF65-F5344CB8AC3E}">
-        <p14:creationId xmlns:p14="http://schemas.microsoft.com/office/powerpoint/2010/main" val="1413515045"/>
+        <p14:creationId xmlns:p14="http://schemas.microsoft.com/office/powerpoint/2010/main" val="3964123086"/>
       </p:ext>
     </p:extLst>
   </p:cSld>
@@ -5328,7 +5377,7 @@
           <p:cNvPr id="2" name="Title 1">
             <a:extLst>
               <a:ext uri="{FF2B5EF4-FFF2-40B4-BE49-F238E27FC236}">
-                <a16:creationId xmlns:a16="http://schemas.microsoft.com/office/drawing/2014/main" id="{8F8A03E2-86DB-7E2E-27C8-F9E468517E53}"/>
+                <a16:creationId xmlns:a16="http://schemas.microsoft.com/office/drawing/2014/main" id="{1832481F-1DA9-CFA6-A70D-10112A748E42}"/>
               </a:ext>
             </a:extLst>
           </p:cNvPr>
@@ -5346,15 +5395,7 @@
           <a:p>
             <a:r>
               <a:rPr lang="en-US"/>
-              <a:t>Some complex examples with arrays and object data with </a:t>
-            </a:r>
-            <a:r>
-              <a:rPr lang="en-US" err="1"/>
-              <a:t>useState</a:t>
-            </a:r>
-            <a:r>
-              <a:rPr lang="en-US"/>
-              <a:t>():</a:t>
+              <a:t>Key points here..</a:t>
             </a:r>
           </a:p>
         </p:txBody>
@@ -5364,7 +5405,7 @@
           <p:cNvPr id="3" name="Content Placeholder 2">
             <a:extLst>
               <a:ext uri="{FF2B5EF4-FFF2-40B4-BE49-F238E27FC236}">
-                <a16:creationId xmlns:a16="http://schemas.microsoft.com/office/drawing/2014/main" id="{D31A9843-66F2-0E8B-8512-D99EE64A22F2}"/>
+                <a16:creationId xmlns:a16="http://schemas.microsoft.com/office/drawing/2014/main" id="{51D13115-D45C-E185-22D0-3234E8DBB11F}"/>
               </a:ext>
             </a:extLst>
           </p:cNvPr>
@@ -5377,38 +5418,83 @@
         </p:nvSpPr>
         <p:spPr/>
         <p:txBody>
-          <a:bodyPr/>
-          <a:lstStyle/>
-          <a:p>
-            <a:r>
-              <a:rPr lang="en-US"/>
-              <a:t>Let’s see how we update a collection!</a:t>
+          <a:bodyPr>
+            <a:normAutofit lnSpcReduction="10000"/>
+          </a:bodyPr>
+          <a:lstStyle/>
+          <a:p>
+            <a:pPr>
+              <a:buFont typeface="Arial" panose="020B0604020202020204" pitchFamily="34" charset="0"/>
+              <a:buChar char="•"/>
+            </a:pPr>
+            <a:r>
+              <a:rPr lang="en-CA" b="1"/>
+              <a:t>State Preservation</a:t>
+            </a:r>
+            <a:r>
+              <a:rPr lang="en-CA"/>
+              <a:t>: State persists across re-renders, so changes to count or user values are retained as the component re-renders.</a:t>
+            </a:r>
+          </a:p>
+          <a:p>
+            <a:pPr>
+              <a:buFont typeface="Arial" panose="020B0604020202020204" pitchFamily="34" charset="0"/>
+              <a:buChar char="•"/>
+            </a:pPr>
+            <a:endParaRPr lang="en-CA"/>
+          </a:p>
+          <a:p>
+            <a:pPr>
+              <a:buFont typeface="Arial" panose="020B0604020202020204" pitchFamily="34" charset="0"/>
+              <a:buChar char="•"/>
+            </a:pPr>
+            <a:r>
+              <a:rPr lang="en-CA" b="1"/>
+              <a:t>Asynchronous Updates</a:t>
+            </a:r>
+            <a:r>
+              <a:rPr lang="en-CA"/>
+              <a:t>: Calling </a:t>
+            </a:r>
+            <a:r>
+              <a:rPr lang="en-CA" err="1"/>
+              <a:t>setState</a:t>
+            </a:r>
+            <a:r>
+              <a:rPr lang="en-CA"/>
+              <a:t> triggers a re-render asynchronously, so multiple state updates may be batched together.</a:t>
+            </a:r>
+          </a:p>
+          <a:p>
+            <a:pPr>
+              <a:buFont typeface="Arial" panose="020B0604020202020204" pitchFamily="34" charset="0"/>
+              <a:buChar char="•"/>
+            </a:pPr>
+            <a:endParaRPr lang="en-CA"/>
+          </a:p>
+          <a:p>
+            <a:r>
+              <a:rPr lang="en-CA"/>
+              <a:t>The </a:t>
+            </a:r>
+            <a:r>
+              <a:rPr lang="en-CA" err="1"/>
+              <a:t>useState</a:t>
+            </a:r>
+            <a:r>
+              <a:rPr lang="en-CA"/>
+              <a:t> Hook is essential for making functional components stateful and interactive, making it easier to handle dynamic data and UI changes in React.</a:t>
             </a:r>
           </a:p>
           <a:p>
             <a:endParaRPr lang="en-US"/>
-          </a:p>
-          <a:p>
-            <a:r>
-              <a:rPr lang="en-US"/>
-              <a:t>First let’s do  it with object</a:t>
-            </a:r>
-          </a:p>
-          <a:p>
-            <a:endParaRPr lang="en-US"/>
-          </a:p>
-          <a:p>
-            <a:r>
-              <a:rPr lang="en-US"/>
-              <a:t>Then with the Array of numbers</a:t>
-            </a:r>
           </a:p>
         </p:txBody>
       </p:sp>
     </p:spTree>
     <p:extLst>
       <p:ext uri="{BB962C8B-B14F-4D97-AF65-F5344CB8AC3E}">
-        <p14:creationId xmlns:p14="http://schemas.microsoft.com/office/powerpoint/2010/main" val="2985054589"/>
+        <p14:creationId xmlns:p14="http://schemas.microsoft.com/office/powerpoint/2010/main" val="1413515045"/>
       </p:ext>
     </p:extLst>
   </p:cSld>
@@ -5440,7 +5526,7 @@
           <p:cNvPr id="2" name="Title 1">
             <a:extLst>
               <a:ext uri="{FF2B5EF4-FFF2-40B4-BE49-F238E27FC236}">
-                <a16:creationId xmlns:a16="http://schemas.microsoft.com/office/drawing/2014/main" id="{8A00D707-E6F4-4349-5507-754B33A2E4EA}"/>
+                <a16:creationId xmlns:a16="http://schemas.microsoft.com/office/drawing/2014/main" id="{8F8A03E2-86DB-7E2E-27C8-F9E468517E53}"/>
               </a:ext>
             </a:extLst>
           </p:cNvPr>
@@ -5457,8 +5543,16 @@
           <a:lstStyle/>
           <a:p>
             <a:r>
-              <a:rPr lang="en-US" dirty="0"/>
-              <a:t>Json Server for mock API:</a:t>
+              <a:rPr lang="en-US"/>
+              <a:t>Some complex examples with arrays and object data with </a:t>
+            </a:r>
+            <a:r>
+              <a:rPr lang="en-US" err="1"/>
+              <a:t>useState</a:t>
+            </a:r>
+            <a:r>
+              <a:rPr lang="en-US"/>
+              <a:t>():</a:t>
             </a:r>
           </a:p>
         </p:txBody>
@@ -5468,7 +5562,7 @@
           <p:cNvPr id="3" name="Content Placeholder 2">
             <a:extLst>
               <a:ext uri="{FF2B5EF4-FFF2-40B4-BE49-F238E27FC236}">
-                <a16:creationId xmlns:a16="http://schemas.microsoft.com/office/drawing/2014/main" id="{EC1C895C-4CB4-A30F-1F98-3D7CFF952F3F}"/>
+                <a16:creationId xmlns:a16="http://schemas.microsoft.com/office/drawing/2014/main" id="{D31A9843-66F2-0E8B-8512-D99EE64A22F2}"/>
               </a:ext>
             </a:extLst>
           </p:cNvPr>
@@ -5485,179 +5579,34 @@
           <a:lstStyle/>
           <a:p>
             <a:r>
-              <a:rPr lang="en-US" dirty="0"/>
-              <a:t>Let’s install </a:t>
-            </a:r>
-            <a:r>
-              <a:rPr lang="en-US" dirty="0" err="1"/>
-              <a:t>json</a:t>
-            </a:r>
-            <a:r>
-              <a:rPr lang="en-US" dirty="0"/>
-              <a:t> server and set up for API calls!</a:t>
-            </a:r>
-          </a:p>
-          <a:p>
-            <a:pPr lvl="1"/>
-            <a:r>
-              <a:rPr lang="en-US" dirty="0"/>
-              <a:t>get, post, put, delete calls to a live own server…</a:t>
-            </a:r>
-          </a:p>
-          <a:p>
-            <a:pPr lvl="1"/>
-            <a:endParaRPr lang="en-US" dirty="0"/>
-          </a:p>
-          <a:p>
-            <a:pPr lvl="1"/>
-            <a:r>
-              <a:rPr lang="en-US" dirty="0"/>
-              <a:t>Step1: </a:t>
-            </a:r>
-            <a:r>
-              <a:rPr lang="en-US" dirty="0" err="1"/>
-              <a:t>npm</a:t>
-            </a:r>
-            <a:r>
-              <a:rPr lang="en-US" dirty="0"/>
-              <a:t> install </a:t>
-            </a:r>
-            <a:r>
-              <a:rPr lang="en-US" dirty="0" err="1"/>
-              <a:t>json</a:t>
-            </a:r>
-            <a:r>
-              <a:rPr lang="en-US" dirty="0"/>
-              <a:t>-server</a:t>
-            </a:r>
-          </a:p>
-          <a:p>
-            <a:pPr lvl="1"/>
-            <a:r>
-              <a:rPr lang="en-US" dirty="0"/>
-              <a:t>Step2: in </a:t>
-            </a:r>
-            <a:r>
-              <a:rPr lang="en-US" dirty="0" err="1"/>
-              <a:t>package.json</a:t>
-            </a:r>
-            <a:r>
-              <a:rPr lang="en-US" dirty="0"/>
-              <a:t>, under “scripts”  write following script:</a:t>
-            </a:r>
-          </a:p>
-          <a:p>
-            <a:pPr lvl="2"/>
-            <a:r>
-              <a:rPr lang="en-US" dirty="0"/>
-              <a:t>”</a:t>
-            </a:r>
-            <a:r>
-              <a:rPr lang="en-US" dirty="0" err="1"/>
-              <a:t>server”:Json-server</a:t>
-            </a:r>
-            <a:r>
-              <a:rPr lang="en-US" dirty="0"/>
-              <a:t> –watch </a:t>
-            </a:r>
-            <a:r>
-              <a:rPr lang="en-US" dirty="0" err="1"/>
-              <a:t>db.json</a:t>
-            </a:r>
-            <a:r>
-              <a:rPr lang="en-US" dirty="0"/>
-              <a:t> –port 5000</a:t>
-            </a:r>
-          </a:p>
-          <a:p>
-            <a:pPr lvl="1"/>
-            <a:r>
-              <a:rPr lang="en-US" dirty="0"/>
-              <a:t>Step3: Create </a:t>
-            </a:r>
-            <a:r>
-              <a:rPr lang="en-US" dirty="0" err="1"/>
-              <a:t>db.json</a:t>
-            </a:r>
-            <a:r>
-              <a:rPr lang="en-US" dirty="0"/>
-              <a:t> and then in  </a:t>
-            </a:r>
-            <a:r>
-              <a:rPr lang="en-US" dirty="0" err="1"/>
-              <a:t>db.json</a:t>
-            </a:r>
-            <a:r>
-              <a:rPr lang="en-US" dirty="0"/>
-              <a:t> and add your data in </a:t>
-            </a:r>
-            <a:r>
-              <a:rPr lang="en-US" dirty="0" err="1"/>
-              <a:t>json</a:t>
-            </a:r>
-            <a:r>
-              <a:rPr lang="en-US" dirty="0"/>
-              <a:t> format there.</a:t>
-            </a:r>
-          </a:p>
-          <a:p>
-            <a:pPr lvl="1"/>
-            <a:r>
-              <a:rPr lang="en-US" dirty="0"/>
-              <a:t>Step4: To run </a:t>
-            </a:r>
-            <a:r>
-              <a:rPr lang="en-US" dirty="0" err="1"/>
-              <a:t>json</a:t>
-            </a:r>
-            <a:r>
-              <a:rPr lang="en-US" dirty="0"/>
-              <a:t> server: </a:t>
-            </a:r>
-            <a:r>
-              <a:rPr lang="en-US" dirty="0" err="1"/>
-              <a:t>npm</a:t>
-            </a:r>
-            <a:r>
-              <a:rPr lang="en-US" dirty="0"/>
-              <a:t> run server</a:t>
-            </a:r>
-          </a:p>
-          <a:p>
-            <a:pPr lvl="1"/>
-            <a:r>
-              <a:rPr lang="en-US" dirty="0"/>
-              <a:t>Step5:T To see the tasks </a:t>
-            </a:r>
-            <a:r>
-              <a:rPr lang="en-US" dirty="0">
-                <a:hlinkClick r:id="rId2"/>
-              </a:rPr>
-              <a:t>http://localhost:5000/tasks</a:t>
-            </a:r>
-            <a:r>
-              <a:rPr lang="en-US" dirty="0"/>
-              <a:t>  [whatever the name of the list is]</a:t>
-            </a:r>
-          </a:p>
-          <a:p>
-            <a:pPr lvl="1"/>
-            <a:endParaRPr lang="en-US" dirty="0"/>
-          </a:p>
-          <a:p>
-            <a:pPr lvl="1"/>
-            <a:endParaRPr lang="en-US" dirty="0"/>
-          </a:p>
-          <a:p>
-            <a:pPr lvl="1"/>
-            <a:endParaRPr lang="en-US" dirty="0"/>
+              <a:rPr lang="en-US"/>
+              <a:t>Let’s see how we update a collection!</a:t>
+            </a:r>
+          </a:p>
+          <a:p>
+            <a:endParaRPr lang="en-US"/>
+          </a:p>
+          <a:p>
+            <a:r>
+              <a:rPr lang="en-US"/>
+              <a:t>First let’s do  it with object</a:t>
+            </a:r>
+          </a:p>
+          <a:p>
+            <a:endParaRPr lang="en-US"/>
+          </a:p>
+          <a:p>
+            <a:r>
+              <a:rPr lang="en-US"/>
+              <a:t>Then with the Array of numbers</a:t>
+            </a:r>
           </a:p>
         </p:txBody>
       </p:sp>
     </p:spTree>
     <p:extLst>
       <p:ext uri="{BB962C8B-B14F-4D97-AF65-F5344CB8AC3E}">
-        <p14:creationId xmlns:p14="http://schemas.microsoft.com/office/powerpoint/2010/main" val="1573104829"/>
+        <p14:creationId xmlns:p14="http://schemas.microsoft.com/office/powerpoint/2010/main" val="2985054589"/>
       </p:ext>
     </p:extLst>
   </p:cSld>
@@ -5689,7 +5638,7 @@
           <p:cNvPr id="2" name="Title 1">
             <a:extLst>
               <a:ext uri="{FF2B5EF4-FFF2-40B4-BE49-F238E27FC236}">
-                <a16:creationId xmlns:a16="http://schemas.microsoft.com/office/drawing/2014/main" id="{1AAF9F7D-CDED-9744-A66B-8C5FD10CB26F}"/>
+                <a16:creationId xmlns:a16="http://schemas.microsoft.com/office/drawing/2014/main" id="{8A00D707-E6F4-4349-5507-754B33A2E4EA}"/>
               </a:ext>
             </a:extLst>
           </p:cNvPr>
@@ -5706,12 +5655,8 @@
           <a:lstStyle/>
           <a:p>
             <a:r>
-              <a:rPr lang="en-US" dirty="0" err="1"/>
-              <a:t>useEffect</a:t>
-            </a:r>
-            <a:r>
-              <a:rPr lang="en-US" dirty="0"/>
-              <a:t>() hook: </a:t>
+              <a:rPr lang="en-US" dirty="0"/>
+              <a:t>Json Server for mock API:</a:t>
             </a:r>
           </a:p>
         </p:txBody>
@@ -5721,7 +5666,7 @@
           <p:cNvPr id="3" name="Content Placeholder 2">
             <a:extLst>
               <a:ext uri="{FF2B5EF4-FFF2-40B4-BE49-F238E27FC236}">
-                <a16:creationId xmlns:a16="http://schemas.microsoft.com/office/drawing/2014/main" id="{BA2D80F3-1581-B217-F0F8-576CCF57D1D1}"/>
+                <a16:creationId xmlns:a16="http://schemas.microsoft.com/office/drawing/2014/main" id="{EC1C895C-4CB4-A30F-1F98-3D7CFF952F3F}"/>
               </a:ext>
             </a:extLst>
           </p:cNvPr>
@@ -5739,23 +5684,178 @@
           <a:p>
             <a:r>
               <a:rPr lang="en-US" dirty="0"/>
-              <a:t>Like some side effects when </a:t>
-            </a:r>
-            <a:r>
-              <a:rPr lang="en-US"/>
-              <a:t>a component </a:t>
-            </a:r>
-            <a:r>
-              <a:rPr lang="en-US" dirty="0"/>
-              <a:t>gets loaded!</a:t>
-            </a:r>
+              <a:t>Let’s install </a:t>
+            </a:r>
+            <a:r>
+              <a:rPr lang="en-US" dirty="0" err="1"/>
+              <a:t>json</a:t>
+            </a:r>
+            <a:r>
+              <a:rPr lang="en-US" dirty="0"/>
+              <a:t> server and set up for API calls!</a:t>
+            </a:r>
+          </a:p>
+          <a:p>
+            <a:pPr lvl="1"/>
+            <a:r>
+              <a:rPr lang="en-US" dirty="0"/>
+              <a:t>get, post, put, delete calls to a live own server…</a:t>
+            </a:r>
+          </a:p>
+          <a:p>
+            <a:pPr lvl="1"/>
+            <a:endParaRPr lang="en-US" dirty="0"/>
+          </a:p>
+          <a:p>
+            <a:pPr lvl="1"/>
+            <a:r>
+              <a:rPr lang="en-US" dirty="0"/>
+              <a:t>Step1: </a:t>
+            </a:r>
+            <a:r>
+              <a:rPr lang="en-US" dirty="0" err="1"/>
+              <a:t>npm</a:t>
+            </a:r>
+            <a:r>
+              <a:rPr lang="en-US" dirty="0"/>
+              <a:t> install </a:t>
+            </a:r>
+            <a:r>
+              <a:rPr lang="en-US" dirty="0" err="1"/>
+              <a:t>json</a:t>
+            </a:r>
+            <a:r>
+              <a:rPr lang="en-US" dirty="0"/>
+              <a:t>-server</a:t>
+            </a:r>
+          </a:p>
+          <a:p>
+            <a:pPr lvl="1"/>
+            <a:r>
+              <a:rPr lang="en-US" dirty="0"/>
+              <a:t>Step2: in </a:t>
+            </a:r>
+            <a:r>
+              <a:rPr lang="en-US" dirty="0" err="1"/>
+              <a:t>package.json</a:t>
+            </a:r>
+            <a:r>
+              <a:rPr lang="en-US" dirty="0"/>
+              <a:t>, under “scripts”  write following script:</a:t>
+            </a:r>
+          </a:p>
+          <a:p>
+            <a:pPr lvl="2"/>
+            <a:r>
+              <a:rPr lang="en-US" dirty="0"/>
+              <a:t>”</a:t>
+            </a:r>
+            <a:r>
+              <a:rPr lang="en-US" dirty="0" err="1"/>
+              <a:t>server”:Json-server</a:t>
+            </a:r>
+            <a:r>
+              <a:rPr lang="en-US" dirty="0"/>
+              <a:t> –watch </a:t>
+            </a:r>
+            <a:r>
+              <a:rPr lang="en-US" dirty="0" err="1"/>
+              <a:t>db.json</a:t>
+            </a:r>
+            <a:r>
+              <a:rPr lang="en-US" dirty="0"/>
+              <a:t> –port 5000</a:t>
+            </a:r>
+          </a:p>
+          <a:p>
+            <a:pPr lvl="1"/>
+            <a:r>
+              <a:rPr lang="en-US" dirty="0"/>
+              <a:t>Step3: Create </a:t>
+            </a:r>
+            <a:r>
+              <a:rPr lang="en-US" dirty="0" err="1"/>
+              <a:t>db.json</a:t>
+            </a:r>
+            <a:r>
+              <a:rPr lang="en-US" dirty="0"/>
+              <a:t> and then in  </a:t>
+            </a:r>
+            <a:r>
+              <a:rPr lang="en-US" dirty="0" err="1"/>
+              <a:t>db.json</a:t>
+            </a:r>
+            <a:r>
+              <a:rPr lang="en-US" dirty="0"/>
+              <a:t> and add your data in </a:t>
+            </a:r>
+            <a:r>
+              <a:rPr lang="en-US" dirty="0" err="1"/>
+              <a:t>json</a:t>
+            </a:r>
+            <a:r>
+              <a:rPr lang="en-US" dirty="0"/>
+              <a:t> format there.</a:t>
+            </a:r>
+          </a:p>
+          <a:p>
+            <a:pPr lvl="1"/>
+            <a:r>
+              <a:rPr lang="en-US" dirty="0"/>
+              <a:t>Step4: To run </a:t>
+            </a:r>
+            <a:r>
+              <a:rPr lang="en-US" dirty="0" err="1"/>
+              <a:t>json</a:t>
+            </a:r>
+            <a:r>
+              <a:rPr lang="en-US" dirty="0"/>
+              <a:t> server: </a:t>
+            </a:r>
+            <a:r>
+              <a:rPr lang="en-US" dirty="0" err="1"/>
+              <a:t>npm</a:t>
+            </a:r>
+            <a:r>
+              <a:rPr lang="en-US" dirty="0"/>
+              <a:t> run server</a:t>
+            </a:r>
+          </a:p>
+          <a:p>
+            <a:pPr lvl="1"/>
+            <a:r>
+              <a:rPr lang="en-US" dirty="0"/>
+              <a:t>Step5:T To see the tasks </a:t>
+            </a:r>
+            <a:r>
+              <a:rPr lang="en-US" dirty="0">
+                <a:hlinkClick r:id="rId2"/>
+              </a:rPr>
+              <a:t>http://localhost:5000/tasks</a:t>
+            </a:r>
+            <a:r>
+              <a:rPr lang="en-US" dirty="0"/>
+              <a:t>  [whatever the name of the list is]</a:t>
+            </a:r>
+          </a:p>
+          <a:p>
+            <a:pPr lvl="1"/>
+            <a:endParaRPr lang="en-US" dirty="0"/>
+          </a:p>
+          <a:p>
+            <a:pPr lvl="1"/>
+            <a:endParaRPr lang="en-US" dirty="0"/>
+          </a:p>
+          <a:p>
+            <a:pPr lvl="1"/>
+            <a:endParaRPr lang="en-US" dirty="0"/>
           </a:p>
         </p:txBody>
       </p:sp>
     </p:spTree>
     <p:extLst>
       <p:ext uri="{BB962C8B-B14F-4D97-AF65-F5344CB8AC3E}">
-        <p14:creationId xmlns:p14="http://schemas.microsoft.com/office/powerpoint/2010/main" val="2188632044"/>
+        <p14:creationId xmlns:p14="http://schemas.microsoft.com/office/powerpoint/2010/main" val="1573104829"/>
       </p:ext>
     </p:extLst>
   </p:cSld>
@@ -5787,7 +5887,7 @@
           <p:cNvPr id="2" name="Title 1">
             <a:extLst>
               <a:ext uri="{FF2B5EF4-FFF2-40B4-BE49-F238E27FC236}">
-                <a16:creationId xmlns:a16="http://schemas.microsoft.com/office/drawing/2014/main" id="{886FC7C6-E0BC-E4EA-60A3-6F30567DCCA9}"/>
+                <a16:creationId xmlns:a16="http://schemas.microsoft.com/office/drawing/2014/main" id="{1AAF9F7D-CDED-9744-A66B-8C5FD10CB26F}"/>
               </a:ext>
             </a:extLst>
           </p:cNvPr>
@@ -5804,8 +5904,12 @@
           <a:lstStyle/>
           <a:p>
             <a:r>
-              <a:rPr lang="en-US" dirty="0"/>
-              <a:t>React Router DOM</a:t>
+              <a:rPr lang="en-US" dirty="0" err="1"/>
+              <a:t>useEffect</a:t>
+            </a:r>
+            <a:r>
+              <a:rPr lang="en-US" dirty="0"/>
+              <a:t>() hook: </a:t>
             </a:r>
           </a:p>
         </p:txBody>
@@ -5815,7 +5919,7 @@
           <p:cNvPr id="3" name="Content Placeholder 2">
             <a:extLst>
               <a:ext uri="{FF2B5EF4-FFF2-40B4-BE49-F238E27FC236}">
-                <a16:creationId xmlns:a16="http://schemas.microsoft.com/office/drawing/2014/main" id="{A6432E16-D545-0999-E5ED-201D6A2111B5}"/>
+                <a16:creationId xmlns:a16="http://schemas.microsoft.com/office/drawing/2014/main" id="{BA2D80F3-1581-B217-F0F8-576CCF57D1D1}"/>
               </a:ext>
             </a:extLst>
           </p:cNvPr>
@@ -5831,36 +5935,25 @@
           <a:bodyPr/>
           <a:lstStyle/>
           <a:p>
-            <a:pPr marL="0" indent="0">
-              <a:buNone/>
-            </a:pPr>
-            <a:r>
-              <a:rPr lang="en-CA" dirty="0"/>
-              <a:t>React Router DOM is a library for implementing dynamic routing in a React application. </a:t>
-            </a:r>
-          </a:p>
-          <a:p>
-            <a:pPr marL="0" indent="0">
-              <a:buNone/>
-            </a:pPr>
-            <a:endParaRPr lang="en-CA" dirty="0"/>
-          </a:p>
-          <a:p>
-            <a:pPr marL="0" indent="0">
-              <a:buNone/>
-            </a:pPr>
-            <a:r>
-              <a:rPr lang="en-CA" dirty="0"/>
-              <a:t>It allows navigation between views, URL parameter handling, and creating single-page applications (SPAs).</a:t>
-            </a:r>
-            <a:endParaRPr lang="en-US" dirty="0"/>
+            <a:r>
+              <a:rPr lang="en-US" dirty="0"/>
+              <a:t>Like some side effects when </a:t>
+            </a:r>
+            <a:r>
+              <a:rPr lang="en-US"/>
+              <a:t>a component </a:t>
+            </a:r>
+            <a:r>
+              <a:rPr lang="en-US" dirty="0"/>
+              <a:t>gets loaded!</a:t>
+            </a:r>
           </a:p>
         </p:txBody>
       </p:sp>
     </p:spTree>
     <p:extLst>
       <p:ext uri="{BB962C8B-B14F-4D97-AF65-F5344CB8AC3E}">
-        <p14:creationId xmlns:p14="http://schemas.microsoft.com/office/powerpoint/2010/main" val="2078014894"/>
+        <p14:creationId xmlns:p14="http://schemas.microsoft.com/office/powerpoint/2010/main" val="2188632044"/>
       </p:ext>
     </p:extLst>
   </p:cSld>
@@ -6048,7 +6141,7 @@
           <p:cNvPr id="2" name="Title 1">
             <a:extLst>
               <a:ext uri="{FF2B5EF4-FFF2-40B4-BE49-F238E27FC236}">
-                <a16:creationId xmlns:a16="http://schemas.microsoft.com/office/drawing/2014/main" id="{EDC8ACE2-2844-90B9-2947-75818A3379C6}"/>
+                <a16:creationId xmlns:a16="http://schemas.microsoft.com/office/drawing/2014/main" id="{886FC7C6-E0BC-E4EA-60A3-6F30567DCCA9}"/>
               </a:ext>
             </a:extLst>
           </p:cNvPr>
@@ -6066,7 +6159,7 @@
           <a:p>
             <a:r>
               <a:rPr lang="en-US" dirty="0"/>
-              <a:t>Key concepts:</a:t>
+              <a:t>React Router DOM</a:t>
             </a:r>
           </a:p>
         </p:txBody>
@@ -6076,7 +6169,7 @@
           <p:cNvPr id="3" name="Content Placeholder 2">
             <a:extLst>
               <a:ext uri="{FF2B5EF4-FFF2-40B4-BE49-F238E27FC236}">
-                <a16:creationId xmlns:a16="http://schemas.microsoft.com/office/drawing/2014/main" id="{E7A985EB-54F7-64DF-55D6-E4BF736A44EA}"/>
+                <a16:creationId xmlns:a16="http://schemas.microsoft.com/office/drawing/2014/main" id="{A6432E16-D545-0999-E5ED-201D6A2111B5}"/>
               </a:ext>
             </a:extLst>
           </p:cNvPr>
@@ -6089,75 +6182,31 @@
         </p:nvSpPr>
         <p:spPr/>
         <p:txBody>
-          <a:bodyPr>
-            <a:normAutofit/>
-          </a:bodyPr>
-          <a:lstStyle/>
-          <a:p>
-            <a:r>
-              <a:rPr lang="en-US" dirty="0"/>
-              <a:t>Routes and Route Components:</a:t>
-            </a:r>
-          </a:p>
-          <a:p>
-            <a:pPr lvl="1"/>
-            <a:r>
-              <a:rPr lang="en-US" dirty="0"/>
-              <a:t>Define different paths (URLs) and associate them with specific React components.</a:t>
-            </a:r>
-          </a:p>
-          <a:p>
-            <a:pPr lvl="1"/>
-            <a:r>
-              <a:rPr lang="en-US" dirty="0"/>
-              <a:t>Render components conditionally based on the URL.</a:t>
-            </a:r>
-          </a:p>
-          <a:p>
-            <a:r>
-              <a:rPr lang="en-US" dirty="0" err="1"/>
-              <a:t>BrowserRouter</a:t>
-            </a:r>
-            <a:r>
-              <a:rPr lang="en-US" dirty="0"/>
-              <a:t>:</a:t>
-            </a:r>
-          </a:p>
-          <a:p>
-            <a:pPr lvl="1"/>
-            <a:r>
-              <a:rPr lang="en-US" dirty="0"/>
-              <a:t>Wraps your application and enables React Router features.</a:t>
-            </a:r>
-          </a:p>
-          <a:p>
-            <a:pPr lvl="1"/>
-            <a:r>
-              <a:rPr lang="en-US" dirty="0"/>
-              <a:t>Uses the HTML5 history API for handling routing.</a:t>
-            </a:r>
-          </a:p>
-          <a:p>
-            <a:r>
-              <a:rPr lang="en-US" dirty="0"/>
-              <a:t>Link:</a:t>
-            </a:r>
-          </a:p>
-          <a:p>
-            <a:pPr lvl="1"/>
-            <a:r>
-              <a:rPr lang="en-US" dirty="0"/>
-              <a:t>Used for navigation without reloading the page.</a:t>
-            </a:r>
-          </a:p>
-          <a:p>
-            <a:pPr lvl="1"/>
-            <a:r>
-              <a:rPr lang="en-US" dirty="0"/>
-              <a:t>Replaces the traditional &lt;a&gt; tag for client-side routing.</a:t>
-            </a:r>
-          </a:p>
-          <a:p>
+          <a:bodyPr/>
+          <a:lstStyle/>
+          <a:p>
+            <a:pPr marL="0" indent="0">
+              <a:buNone/>
+            </a:pPr>
+            <a:r>
+              <a:rPr lang="en-CA" dirty="0"/>
+              <a:t>React Router DOM is a library for implementing dynamic routing in a React application. </a:t>
+            </a:r>
+          </a:p>
+          <a:p>
+            <a:pPr marL="0" indent="0">
+              <a:buNone/>
+            </a:pPr>
+            <a:endParaRPr lang="en-CA" dirty="0"/>
+          </a:p>
+          <a:p>
+            <a:pPr marL="0" indent="0">
+              <a:buNone/>
+            </a:pPr>
+            <a:r>
+              <a:rPr lang="en-CA" dirty="0"/>
+              <a:t>It allows navigation between views, URL parameter handling, and creating single-page applications (SPAs).</a:t>
+            </a:r>
             <a:endParaRPr lang="en-US" dirty="0"/>
           </a:p>
         </p:txBody>
@@ -6165,7 +6214,7 @@
     </p:spTree>
     <p:extLst>
       <p:ext uri="{BB962C8B-B14F-4D97-AF65-F5344CB8AC3E}">
-        <p14:creationId xmlns:p14="http://schemas.microsoft.com/office/powerpoint/2010/main" val="510285476"/>
+        <p14:creationId xmlns:p14="http://schemas.microsoft.com/office/powerpoint/2010/main" val="2078014894"/>
       </p:ext>
     </p:extLst>
   </p:cSld>
@@ -6197,7 +6246,7 @@
           <p:cNvPr id="2" name="Title 1">
             <a:extLst>
               <a:ext uri="{FF2B5EF4-FFF2-40B4-BE49-F238E27FC236}">
-                <a16:creationId xmlns:a16="http://schemas.microsoft.com/office/drawing/2014/main" id="{17B26374-8B51-DEE9-1F7F-66FD60A195D9}"/>
+                <a16:creationId xmlns:a16="http://schemas.microsoft.com/office/drawing/2014/main" id="{EDC8ACE2-2844-90B9-2947-75818A3379C6}"/>
               </a:ext>
             </a:extLst>
           </p:cNvPr>
@@ -6215,7 +6264,7 @@
           <a:p>
             <a:r>
               <a:rPr lang="en-US" dirty="0"/>
-              <a:t>Continued..</a:t>
+              <a:t>Key concepts:</a:t>
             </a:r>
           </a:p>
         </p:txBody>
@@ -6225,7 +6274,7 @@
           <p:cNvPr id="3" name="Content Placeholder 2">
             <a:extLst>
               <a:ext uri="{FF2B5EF4-FFF2-40B4-BE49-F238E27FC236}">
-                <a16:creationId xmlns:a16="http://schemas.microsoft.com/office/drawing/2014/main" id="{99D034D8-A655-54D9-E8A8-43A7BD7F1758}"/>
+                <a16:creationId xmlns:a16="http://schemas.microsoft.com/office/drawing/2014/main" id="{E7A985EB-54F7-64DF-55D6-E4BF736A44EA}"/>
               </a:ext>
             </a:extLst>
           </p:cNvPr>
@@ -6238,57 +6287,72 @@
         </p:nvSpPr>
         <p:spPr/>
         <p:txBody>
-          <a:bodyPr/>
-          <a:lstStyle/>
-          <a:p>
-            <a:r>
-              <a:rPr lang="en-CA" b="1" dirty="0" err="1"/>
-              <a:t>useNavigate</a:t>
-            </a:r>
-            <a:r>
-              <a:rPr lang="en-CA" dirty="0"/>
+          <a:bodyPr>
+            <a:normAutofit/>
+          </a:bodyPr>
+          <a:lstStyle/>
+          <a:p>
+            <a:r>
+              <a:rPr lang="en-US" dirty="0"/>
+              <a:t>Routes and Route Components:</a:t>
+            </a:r>
+          </a:p>
+          <a:p>
+            <a:pPr lvl="1"/>
+            <a:r>
+              <a:rPr lang="en-US" dirty="0"/>
+              <a:t>Define different paths (URLs) and associate them with specific React components.</a:t>
+            </a:r>
+          </a:p>
+          <a:p>
+            <a:pPr lvl="1"/>
+            <a:r>
+              <a:rPr lang="en-US" dirty="0"/>
+              <a:t>Render components conditionally based on the URL.</a:t>
+            </a:r>
+          </a:p>
+          <a:p>
+            <a:r>
+              <a:rPr lang="en-US" dirty="0" err="1"/>
+              <a:t>BrowserRouter</a:t>
+            </a:r>
+            <a:r>
+              <a:rPr lang="en-US" dirty="0"/>
               <a:t>:</a:t>
             </a:r>
           </a:p>
           <a:p>
             <a:pPr lvl="1"/>
             <a:r>
-              <a:rPr lang="en-CA" dirty="0"/>
-              <a:t>A hook for programmatic navigation.</a:t>
-            </a:r>
-          </a:p>
-          <a:p>
-            <a:r>
-              <a:rPr lang="en-CA" b="1" dirty="0" err="1"/>
-              <a:t>useParams</a:t>
-            </a:r>
-            <a:r>
-              <a:rPr lang="en-CA" dirty="0"/>
-              <a:t>:</a:t>
+              <a:rPr lang="en-US" dirty="0"/>
+              <a:t>Wraps your application and enables React Router features.</a:t>
             </a:r>
           </a:p>
           <a:p>
             <a:pPr lvl="1"/>
             <a:r>
-              <a:rPr lang="en-CA" dirty="0"/>
-              <a:t>Extracts route parameters from the URL.</a:t>
-            </a:r>
-          </a:p>
-          <a:p>
-            <a:r>
-              <a:rPr lang="en-CA" b="1" dirty="0" err="1"/>
-              <a:t>useLocation</a:t>
-            </a:r>
-            <a:r>
-              <a:rPr lang="en-CA" dirty="0"/>
-              <a:t>:</a:t>
+              <a:rPr lang="en-US" dirty="0"/>
+              <a:t>Uses the HTML5 history API for handling routing.</a:t>
+            </a:r>
+          </a:p>
+          <a:p>
+            <a:r>
+              <a:rPr lang="en-US" dirty="0"/>
+              <a:t>Link:</a:t>
             </a:r>
           </a:p>
           <a:p>
             <a:pPr lvl="1"/>
             <a:r>
-              <a:rPr lang="en-CA" dirty="0"/>
-              <a:t>Provides the current location object, including pathname and state.</a:t>
+              <a:rPr lang="en-US" dirty="0"/>
+              <a:t>Used for navigation without reloading the page.</a:t>
+            </a:r>
+          </a:p>
+          <a:p>
+            <a:pPr lvl="1"/>
+            <a:r>
+              <a:rPr lang="en-US" dirty="0"/>
+              <a:t>Replaces the traditional &lt;a&gt; tag for client-side routing.</a:t>
             </a:r>
           </a:p>
           <a:p>
@@ -6299,7 +6363,7 @@
     </p:spTree>
     <p:extLst>
       <p:ext uri="{BB962C8B-B14F-4D97-AF65-F5344CB8AC3E}">
-        <p14:creationId xmlns:p14="http://schemas.microsoft.com/office/powerpoint/2010/main" val="3158927088"/>
+        <p14:creationId xmlns:p14="http://schemas.microsoft.com/office/powerpoint/2010/main" val="510285476"/>
       </p:ext>
     </p:extLst>
   </p:cSld>
@@ -6331,7 +6395,7 @@
           <p:cNvPr id="2" name="Title 1">
             <a:extLst>
               <a:ext uri="{FF2B5EF4-FFF2-40B4-BE49-F238E27FC236}">
-                <a16:creationId xmlns:a16="http://schemas.microsoft.com/office/drawing/2014/main" id="{D740C3FA-2C9C-9984-4F15-76F4125DF6F7}"/>
+                <a16:creationId xmlns:a16="http://schemas.microsoft.com/office/drawing/2014/main" id="{17B26374-8B51-DEE9-1F7F-66FD60A195D9}"/>
               </a:ext>
             </a:extLst>
           </p:cNvPr>
@@ -6349,7 +6413,7 @@
           <a:p>
             <a:r>
               <a:rPr lang="en-US" dirty="0"/>
-              <a:t>Installation</a:t>
+              <a:t>Continued..</a:t>
             </a:r>
           </a:p>
         </p:txBody>
@@ -6359,7 +6423,7 @@
           <p:cNvPr id="3" name="Content Placeholder 2">
             <a:extLst>
               <a:ext uri="{FF2B5EF4-FFF2-40B4-BE49-F238E27FC236}">
-                <a16:creationId xmlns:a16="http://schemas.microsoft.com/office/drawing/2014/main" id="{8096538A-0CF5-DE94-6F68-425C7239A207}"/>
+                <a16:creationId xmlns:a16="http://schemas.microsoft.com/office/drawing/2014/main" id="{99D034D8-A655-54D9-E8A8-43A7BD7F1758}"/>
               </a:ext>
             </a:extLst>
           </p:cNvPr>
@@ -6375,33 +6439,57 @@
           <a:bodyPr/>
           <a:lstStyle/>
           <a:p>
-            <a:pPr marL="0" indent="0">
-              <a:buNone/>
-            </a:pPr>
-            <a:endParaRPr lang="en-CA" dirty="0"/>
-          </a:p>
-          <a:p>
-            <a:pPr marL="0" indent="0">
-              <a:buNone/>
-            </a:pPr>
-            <a:endParaRPr lang="en-CA" dirty="0"/>
-          </a:p>
-          <a:p>
-            <a:pPr marL="0" indent="0">
-              <a:buNone/>
-            </a:pPr>
-            <a:r>
-              <a:rPr lang="en-CA" dirty="0" err="1"/>
-              <a:t>npm</a:t>
+            <a:r>
+              <a:rPr lang="en-CA" b="1" dirty="0" err="1"/>
+              <a:t>useNavigate</a:t>
             </a:r>
             <a:r>
               <a:rPr lang="en-CA" dirty="0"/>
-              <a:t> install react-router-</a:t>
-            </a:r>
-            <a:r>
-              <a:rPr lang="en-CA" dirty="0" err="1"/>
-              <a:t>dom</a:t>
-            </a:r>
+              <a:t>:</a:t>
+            </a:r>
+          </a:p>
+          <a:p>
+            <a:pPr lvl="1"/>
+            <a:r>
+              <a:rPr lang="en-CA" dirty="0"/>
+              <a:t>A hook for programmatic navigation.</a:t>
+            </a:r>
+          </a:p>
+          <a:p>
+            <a:r>
+              <a:rPr lang="en-CA" b="1" dirty="0" err="1"/>
+              <a:t>useParams</a:t>
+            </a:r>
+            <a:r>
+              <a:rPr lang="en-CA" dirty="0"/>
+              <a:t>:</a:t>
+            </a:r>
+          </a:p>
+          <a:p>
+            <a:pPr lvl="1"/>
+            <a:r>
+              <a:rPr lang="en-CA" dirty="0"/>
+              <a:t>Extracts route parameters from the URL.</a:t>
+            </a:r>
+          </a:p>
+          <a:p>
+            <a:r>
+              <a:rPr lang="en-CA" b="1" dirty="0" err="1"/>
+              <a:t>useLocation</a:t>
+            </a:r>
+            <a:r>
+              <a:rPr lang="en-CA" dirty="0"/>
+              <a:t>:</a:t>
+            </a:r>
+          </a:p>
+          <a:p>
+            <a:pPr lvl="1"/>
+            <a:r>
+              <a:rPr lang="en-CA" dirty="0"/>
+              <a:t>Provides the current location object, including pathname and state.</a:t>
+            </a:r>
+          </a:p>
+          <a:p>
             <a:endParaRPr lang="en-US" dirty="0"/>
           </a:p>
         </p:txBody>
@@ -6409,7 +6497,7 @@
     </p:spTree>
     <p:extLst>
       <p:ext uri="{BB962C8B-B14F-4D97-AF65-F5344CB8AC3E}">
-        <p14:creationId xmlns:p14="http://schemas.microsoft.com/office/powerpoint/2010/main" val="175778223"/>
+        <p14:creationId xmlns:p14="http://schemas.microsoft.com/office/powerpoint/2010/main" val="3158927088"/>
       </p:ext>
     </p:extLst>
   </p:cSld>
@@ -6441,7 +6529,7 @@
           <p:cNvPr id="2" name="Title 1">
             <a:extLst>
               <a:ext uri="{FF2B5EF4-FFF2-40B4-BE49-F238E27FC236}">
-                <a16:creationId xmlns:a16="http://schemas.microsoft.com/office/drawing/2014/main" id="{56CC2D30-FE70-725A-DEE2-ADAFFCF435F1}"/>
+                <a16:creationId xmlns:a16="http://schemas.microsoft.com/office/drawing/2014/main" id="{D740C3FA-2C9C-9984-4F15-76F4125DF6F7}"/>
               </a:ext>
             </a:extLst>
           </p:cNvPr>
@@ -6459,7 +6547,7 @@
           <a:p>
             <a:r>
               <a:rPr lang="en-US" dirty="0"/>
-              <a:t>Advantages</a:t>
+              <a:t>Installation</a:t>
             </a:r>
           </a:p>
         </p:txBody>
@@ -6469,7 +6557,7 @@
           <p:cNvPr id="3" name="Content Placeholder 2">
             <a:extLst>
               <a:ext uri="{FF2B5EF4-FFF2-40B4-BE49-F238E27FC236}">
-                <a16:creationId xmlns:a16="http://schemas.microsoft.com/office/drawing/2014/main" id="{23354C66-95C3-FC42-2882-F8A2B28EB24E}"/>
+                <a16:creationId xmlns:a16="http://schemas.microsoft.com/office/drawing/2014/main" id="{8096538A-0CF5-DE94-6F68-425C7239A207}"/>
               </a:ext>
             </a:extLst>
           </p:cNvPr>
@@ -6482,58 +6570,35 @@
         </p:nvSpPr>
         <p:spPr/>
         <p:txBody>
-          <a:bodyPr>
-            <a:normAutofit lnSpcReduction="10000"/>
-          </a:bodyPr>
-          <a:lstStyle/>
-          <a:p>
+          <a:bodyPr/>
+          <a:lstStyle/>
+          <a:p>
+            <a:pPr marL="0" indent="0">
+              <a:buNone/>
+            </a:pPr>
+            <a:endParaRPr lang="en-CA" dirty="0"/>
+          </a:p>
+          <a:p>
+            <a:pPr marL="0" indent="0">
+              <a:buNone/>
+            </a:pPr>
+            <a:endParaRPr lang="en-CA" dirty="0"/>
+          </a:p>
+          <a:p>
+            <a:pPr marL="0" indent="0">
+              <a:buNone/>
+            </a:pPr>
+            <a:r>
+              <a:rPr lang="en-CA" dirty="0" err="1"/>
+              <a:t>npm</a:t>
+            </a:r>
             <a:r>
               <a:rPr lang="en-CA" dirty="0"/>
-              <a:t>Seamless navigation between views without page reloads.</a:t>
-            </a:r>
-          </a:p>
-          <a:p>
-            <a:r>
-              <a:rPr lang="en-CA" dirty="0"/>
-              <a:t>Easily manage application state through URLs.</a:t>
-            </a:r>
-          </a:p>
-          <a:p>
-            <a:r>
-              <a:rPr lang="en-CA" dirty="0"/>
-              <a:t>Simplifies creating SPAs.</a:t>
-            </a:r>
-          </a:p>
-          <a:p>
-            <a:r>
-              <a:rPr lang="en-CA" dirty="0"/>
-              <a:t>Supports dynamic and nested routing.</a:t>
-            </a:r>
-          </a:p>
-          <a:p>
-            <a:endParaRPr lang="en-CA" dirty="0"/>
-          </a:p>
-          <a:p>
-            <a:endParaRPr lang="en-CA" dirty="0"/>
-          </a:p>
-          <a:p>
-            <a:endParaRPr lang="en-CA" dirty="0"/>
-          </a:p>
-          <a:p>
-            <a:pPr marL="0" indent="0">
-              <a:buNone/>
-            </a:pPr>
-            <a:r>
-              <a:rPr lang="en-CA" dirty="0"/>
-              <a:t>With React Router DOM, routing becomes intuitive and integrates well with </a:t>
+              <a:t> install react-router-</a:t>
             </a:r>
             <a:r>
               <a:rPr lang="en-CA" dirty="0" err="1"/>
-              <a:t>React's</a:t>
-            </a:r>
-            <a:r>
-              <a:rPr lang="en-CA" dirty="0"/>
-              <a:t> component-based architecture.</a:t>
+              <a:t>dom</a:t>
             </a:r>
             <a:endParaRPr lang="en-US" dirty="0"/>
           </a:p>
@@ -6542,7 +6607,7 @@
     </p:spTree>
     <p:extLst>
       <p:ext uri="{BB962C8B-B14F-4D97-AF65-F5344CB8AC3E}">
-        <p14:creationId xmlns:p14="http://schemas.microsoft.com/office/powerpoint/2010/main" val="2349825810"/>
+        <p14:creationId xmlns:p14="http://schemas.microsoft.com/office/powerpoint/2010/main" val="175778223"/>
       </p:ext>
     </p:extLst>
   </p:cSld>
@@ -6574,7 +6639,7 @@
           <p:cNvPr id="2" name="Title 1">
             <a:extLst>
               <a:ext uri="{FF2B5EF4-FFF2-40B4-BE49-F238E27FC236}">
-                <a16:creationId xmlns:a16="http://schemas.microsoft.com/office/drawing/2014/main" id="{772F9CCF-9505-C357-0C9B-6FDCF7B2DBD7}"/>
+                <a16:creationId xmlns:a16="http://schemas.microsoft.com/office/drawing/2014/main" id="{56CC2D30-FE70-725A-DEE2-ADAFFCF435F1}"/>
               </a:ext>
             </a:extLst>
           </p:cNvPr>
@@ -6592,7 +6657,7 @@
           <a:p>
             <a:r>
               <a:rPr lang="en-US" dirty="0"/>
-              <a:t>Framer-motion</a:t>
+              <a:t>Advantages</a:t>
             </a:r>
           </a:p>
         </p:txBody>
@@ -6602,7 +6667,7 @@
           <p:cNvPr id="3" name="Content Placeholder 2">
             <a:extLst>
               <a:ext uri="{FF2B5EF4-FFF2-40B4-BE49-F238E27FC236}">
-                <a16:creationId xmlns:a16="http://schemas.microsoft.com/office/drawing/2014/main" id="{5EB7F4EA-32EF-3994-0D67-B5B2589AFF7E}"/>
+                <a16:creationId xmlns:a16="http://schemas.microsoft.com/office/drawing/2014/main" id="{23354C66-95C3-FC42-2882-F8A2B28EB24E}"/>
               </a:ext>
             </a:extLst>
           </p:cNvPr>
@@ -6615,21 +6680,58 @@
         </p:nvSpPr>
         <p:spPr/>
         <p:txBody>
-          <a:bodyPr/>
+          <a:bodyPr>
+            <a:normAutofit lnSpcReduction="10000"/>
+          </a:bodyPr>
           <a:lstStyle/>
           <a:p>
             <a:r>
               <a:rPr lang="en-CA" dirty="0"/>
-              <a:t>Framer Motion is a powerful React library for adding animations and transitions to your React components. </a:t>
+              <a:t>Seamless navigation between views without page reloads.</a:t>
+            </a:r>
+          </a:p>
+          <a:p>
+            <a:r>
+              <a:rPr lang="en-CA" dirty="0"/>
+              <a:t>Easily manage application state through URLs.</a:t>
+            </a:r>
+          </a:p>
+          <a:p>
+            <a:r>
+              <a:rPr lang="en-CA" dirty="0"/>
+              <a:t>Simplifies creating SPAs.</a:t>
+            </a:r>
+          </a:p>
+          <a:p>
+            <a:r>
+              <a:rPr lang="en-CA" dirty="0"/>
+              <a:t>Supports dynamic and nested routing.</a:t>
             </a:r>
           </a:p>
           <a:p>
             <a:endParaRPr lang="en-CA" dirty="0"/>
           </a:p>
           <a:p>
+            <a:endParaRPr lang="en-CA" dirty="0"/>
+          </a:p>
+          <a:p>
+            <a:endParaRPr lang="en-CA" dirty="0"/>
+          </a:p>
+          <a:p>
+            <a:pPr marL="0" indent="0">
+              <a:buNone/>
+            </a:pPr>
             <a:r>
               <a:rPr lang="en-CA" dirty="0"/>
-              <a:t>It provides a declarative way to define animations, making it easy to create smooth, high-performance animations without writing complex CSS or JavaScript logic.</a:t>
+              <a:t>With React Router DOM, routing becomes intuitive and integrates well with </a:t>
+            </a:r>
+            <a:r>
+              <a:rPr lang="en-CA" dirty="0" err="1"/>
+              <a:t>React's</a:t>
+            </a:r>
+            <a:r>
+              <a:rPr lang="en-CA" dirty="0"/>
+              <a:t> component-based architecture.</a:t>
             </a:r>
             <a:endParaRPr lang="en-US" dirty="0"/>
           </a:p>
@@ -6638,7 +6740,7 @@
     </p:spTree>
     <p:extLst>
       <p:ext uri="{BB962C8B-B14F-4D97-AF65-F5344CB8AC3E}">
-        <p14:creationId xmlns:p14="http://schemas.microsoft.com/office/powerpoint/2010/main" val="3240953034"/>
+        <p14:creationId xmlns:p14="http://schemas.microsoft.com/office/powerpoint/2010/main" val="2349825810"/>
       </p:ext>
     </p:extLst>
   </p:cSld>
@@ -6670,6 +6772,102 @@
           <p:cNvPr id="2" name="Title 1">
             <a:extLst>
               <a:ext uri="{FF2B5EF4-FFF2-40B4-BE49-F238E27FC236}">
+                <a16:creationId xmlns:a16="http://schemas.microsoft.com/office/drawing/2014/main" id="{772F9CCF-9505-C357-0C9B-6FDCF7B2DBD7}"/>
+              </a:ext>
+            </a:extLst>
+          </p:cNvPr>
+          <p:cNvSpPr>
+            <a:spLocks noGrp="1"/>
+          </p:cNvSpPr>
+          <p:nvPr>
+            <p:ph type="title"/>
+          </p:nvPr>
+        </p:nvSpPr>
+        <p:spPr/>
+        <p:txBody>
+          <a:bodyPr/>
+          <a:lstStyle/>
+          <a:p>
+            <a:r>
+              <a:rPr lang="en-US" dirty="0"/>
+              <a:t>Framer-motion</a:t>
+            </a:r>
+          </a:p>
+        </p:txBody>
+      </p:sp>
+      <p:sp>
+        <p:nvSpPr>
+          <p:cNvPr id="3" name="Content Placeholder 2">
+            <a:extLst>
+              <a:ext uri="{FF2B5EF4-FFF2-40B4-BE49-F238E27FC236}">
+                <a16:creationId xmlns:a16="http://schemas.microsoft.com/office/drawing/2014/main" id="{5EB7F4EA-32EF-3994-0D67-B5B2589AFF7E}"/>
+              </a:ext>
+            </a:extLst>
+          </p:cNvPr>
+          <p:cNvSpPr>
+            <a:spLocks noGrp="1"/>
+          </p:cNvSpPr>
+          <p:nvPr>
+            <p:ph idx="1"/>
+          </p:nvPr>
+        </p:nvSpPr>
+        <p:spPr/>
+        <p:txBody>
+          <a:bodyPr/>
+          <a:lstStyle/>
+          <a:p>
+            <a:r>
+              <a:rPr lang="en-CA" dirty="0"/>
+              <a:t>Framer Motion is a powerful React library for adding animations and transitions to your React components. </a:t>
+            </a:r>
+          </a:p>
+          <a:p>
+            <a:endParaRPr lang="en-CA" dirty="0"/>
+          </a:p>
+          <a:p>
+            <a:r>
+              <a:rPr lang="en-CA" dirty="0"/>
+              <a:t>It provides a declarative way to define animations, making it easy to create smooth, high-performance animations without writing complex CSS or JavaScript logic.</a:t>
+            </a:r>
+            <a:endParaRPr lang="en-US" dirty="0"/>
+          </a:p>
+        </p:txBody>
+      </p:sp>
+    </p:spTree>
+    <p:extLst>
+      <p:ext uri="{BB962C8B-B14F-4D97-AF65-F5344CB8AC3E}">
+        <p14:creationId xmlns:p14="http://schemas.microsoft.com/office/powerpoint/2010/main" val="3240953034"/>
+      </p:ext>
+    </p:extLst>
+  </p:cSld>
+  <p:clrMapOvr>
+    <a:masterClrMapping/>
+  </p:clrMapOvr>
+</p:sld>
+</file>
+
+<file path=ppt/slides/slide36.xml><?xml version="1.0" encoding="utf-8"?>
+<p:sld xmlns:a="http://schemas.openxmlformats.org/drawingml/2006/main" xmlns:r="http://schemas.openxmlformats.org/officeDocument/2006/relationships" xmlns:p="http://schemas.openxmlformats.org/presentationml/2006/main">
+  <p:cSld>
+    <p:spTree>
+      <p:nvGrpSpPr>
+        <p:cNvPr id="1" name=""/>
+        <p:cNvGrpSpPr/>
+        <p:nvPr/>
+      </p:nvGrpSpPr>
+      <p:grpSpPr>
+        <a:xfrm>
+          <a:off x="0" y="0"/>
+          <a:ext cx="0" cy="0"/>
+          <a:chOff x="0" y="0"/>
+          <a:chExt cx="0" cy="0"/>
+        </a:xfrm>
+      </p:grpSpPr>
+      <p:sp>
+        <p:nvSpPr>
+          <p:cNvPr id="2" name="Title 1">
+            <a:extLst>
+              <a:ext uri="{FF2B5EF4-FFF2-40B4-BE49-F238E27FC236}">
                 <a16:creationId xmlns:a16="http://schemas.microsoft.com/office/drawing/2014/main" id="{8B40AEC2-7F58-68C1-9A78-E9A5FC371668}"/>
               </a:ext>
             </a:extLst>
@@ -6787,7 +6985,7 @@
 </p:sld>
 </file>
 
-<file path=ppt/slides/slide36.xml><?xml version="1.0" encoding="utf-8"?>
+<file path=ppt/slides/slide37.xml><?xml version="1.0" encoding="utf-8"?>
 <p:sld xmlns:a="http://schemas.openxmlformats.org/drawingml/2006/main" xmlns:r="http://schemas.openxmlformats.org/officeDocument/2006/relationships" xmlns:p="http://schemas.openxmlformats.org/presentationml/2006/main">
   <p:cSld>
     <p:spTree>

--- a/JavaScript/Week10/Week10.pptx
+++ b/JavaScript/Week10/Week10.pptx
@@ -153,7 +153,7 @@
   <pc:docChgLst>
     <pc:chgData name="Noman  Atique" userId="aab35d70-e8e0-4a76-8862-eddb3a1d4775" providerId="ADAL" clId="{D4AAC077-1EEA-4817-98ED-55C003801FB8}"/>
     <pc:docChg chg="custSel addSld modSld">
-      <pc:chgData name="Noman  Atique" userId="aab35d70-e8e0-4a76-8862-eddb3a1d4775" providerId="ADAL" clId="{D4AAC077-1EEA-4817-98ED-55C003801FB8}" dt="2026-03-17T15:05:42.541" v="682" actId="207"/>
+      <pc:chgData name="Noman  Atique" userId="aab35d70-e8e0-4a76-8862-eddb3a1d4775" providerId="ADAL" clId="{D4AAC077-1EEA-4817-98ED-55C003801FB8}" dt="2026-03-18T15:00:40.204" v="685" actId="207"/>
       <pc:docMkLst>
         <pc:docMk/>
       </pc:docMkLst>
@@ -184,6 +184,36 @@
             <pc:docMk/>
             <pc:sldMk cId="1085325407" sldId="267"/>
             <ac:spMk id="3" creationId="{8A47A6F7-72E4-A786-7E14-02CBCCF338FF}"/>
+          </ac:spMkLst>
+        </pc:spChg>
+      </pc:sldChg>
+      <pc:sldChg chg="modSp mod">
+        <pc:chgData name="Noman  Atique" userId="aab35d70-e8e0-4a76-8862-eddb3a1d4775" providerId="ADAL" clId="{D4AAC077-1EEA-4817-98ED-55C003801FB8}" dt="2026-03-18T14:58:51.467" v="683" actId="207"/>
+        <pc:sldMkLst>
+          <pc:docMk/>
+          <pc:sldMk cId="1655269223" sldId="271"/>
+        </pc:sldMkLst>
+        <pc:spChg chg="mod">
+          <ac:chgData name="Noman  Atique" userId="aab35d70-e8e0-4a76-8862-eddb3a1d4775" providerId="ADAL" clId="{D4AAC077-1EEA-4817-98ED-55C003801FB8}" dt="2026-03-18T14:58:51.467" v="683" actId="207"/>
+          <ac:spMkLst>
+            <pc:docMk/>
+            <pc:sldMk cId="1655269223" sldId="271"/>
+            <ac:spMk id="3" creationId="{A94837B4-BEF3-229F-7C74-8B59A5E393DF}"/>
+          </ac:spMkLst>
+        </pc:spChg>
+      </pc:sldChg>
+      <pc:sldChg chg="modSp mod">
+        <pc:chgData name="Noman  Atique" userId="aab35d70-e8e0-4a76-8862-eddb3a1d4775" providerId="ADAL" clId="{D4AAC077-1EEA-4817-98ED-55C003801FB8}" dt="2026-03-18T15:00:40.204" v="685" actId="207"/>
+        <pc:sldMkLst>
+          <pc:docMk/>
+          <pc:sldMk cId="778149645" sldId="272"/>
+        </pc:sldMkLst>
+        <pc:spChg chg="mod">
+          <ac:chgData name="Noman  Atique" userId="aab35d70-e8e0-4a76-8862-eddb3a1d4775" providerId="ADAL" clId="{D4AAC077-1EEA-4817-98ED-55C003801FB8}" dt="2026-03-18T15:00:40.204" v="685" actId="207"/>
+          <ac:spMkLst>
+            <pc:docMk/>
+            <pc:sldMk cId="778149645" sldId="272"/>
+            <ac:spMk id="3" creationId="{A84FE289-198F-16C4-9E78-FE756F340551}"/>
           </ac:spMkLst>
         </pc:spChg>
       </pc:sldChg>
@@ -4169,36 +4199,48 @@
           <a:lstStyle/>
           <a:p>
             <a:r>
-              <a:rPr lang="en-CA"/>
+              <a:rPr lang="en-CA" dirty="0"/>
               <a:t>In React, </a:t>
             </a:r>
             <a:r>
-              <a:rPr lang="en-CA" b="1"/>
+              <a:rPr lang="en-CA" b="1" dirty="0"/>
               <a:t>state</a:t>
             </a:r>
             <a:r>
-              <a:rPr lang="en-CA"/>
+              <a:rPr lang="en-CA" dirty="0"/>
               <a:t> refers to an object that holds data or information about a component, determining how it renders and behaves.</a:t>
             </a:r>
           </a:p>
           <a:p>
-            <a:endParaRPr lang="en-CA"/>
-          </a:p>
-          <a:p>
-            <a:r>
-              <a:rPr lang="en-CA"/>
+            <a:endParaRPr lang="en-CA" dirty="0"/>
+          </a:p>
+          <a:p>
+            <a:r>
+              <a:rPr lang="en-CA" dirty="0"/>
               <a:t>Each component can have its own state, which is stored internally and can be updated over time. </a:t>
             </a:r>
           </a:p>
           <a:p>
-            <a:endParaRPr lang="en-CA"/>
-          </a:p>
-          <a:p>
-            <a:r>
-              <a:rPr lang="en-CA"/>
-              <a:t>State is essential for making React applications interactive and dynamic, as it allows components to respond to user inputs, changes in data, or other events by re-rendering the UI with new data. (Remember our balls project in vanilla JavaScript?)</a:t>
-            </a:r>
-            <a:endParaRPr lang="en-US"/>
+            <a:endParaRPr lang="en-CA" dirty="0"/>
+          </a:p>
+          <a:p>
+            <a:r>
+              <a:rPr lang="en-CA" dirty="0"/>
+              <a:t>State is essential for making React applications interactive and dynamic, as it allows components to respond to user inputs, changes in data, or other </a:t>
+            </a:r>
+            <a:r>
+              <a:rPr lang="en-CA" dirty="0">
+                <a:solidFill>
+                  <a:srgbClr val="FFFF00"/>
+                </a:solidFill>
+              </a:rPr>
+              <a:t>events by re-rendering the UI with new data. </a:t>
+            </a:r>
+            <a:r>
+              <a:rPr lang="en-CA" dirty="0"/>
+              <a:t>(Remember our balls project in vanilla JavaScript?)</a:t>
+            </a:r>
+            <a:endParaRPr lang="en-US" dirty="0"/>
           </a:p>
         </p:txBody>
       </p:sp>
@@ -4284,28 +4326,48 @@
           <a:lstStyle/>
           <a:p>
             <a:r>
-              <a:rPr lang="en-CA" b="1"/>
+              <a:rPr lang="en-CA" b="1" dirty="0"/>
               <a:t>Managed Locally</a:t>
             </a:r>
             <a:r>
-              <a:rPr lang="en-CA"/>
-              <a:t>: State is managed within a component and does not directly affect other components unless passed as props.</a:t>
-            </a:r>
-          </a:p>
-          <a:p>
-            <a:endParaRPr lang="en-CA"/>
-          </a:p>
-          <a:p>
-            <a:r>
-              <a:rPr lang="en-CA" b="1"/>
+              <a:rPr lang="en-CA" dirty="0"/>
+              <a:t>: State is managed within a component and does not directly affect other components unless </a:t>
+            </a:r>
+            <a:r>
+              <a:rPr lang="en-CA" dirty="0">
+                <a:solidFill>
+                  <a:srgbClr val="FFFF00"/>
+                </a:solidFill>
+              </a:rPr>
+              <a:t>passed as props.</a:t>
+            </a:r>
+          </a:p>
+          <a:p>
+            <a:endParaRPr lang="en-CA" dirty="0"/>
+          </a:p>
+          <a:p>
+            <a:r>
+              <a:rPr lang="en-CA" b="1" dirty="0"/>
               <a:t>Reactivity</a:t>
             </a:r>
             <a:r>
-              <a:rPr lang="en-CA"/>
-              <a:t>: When state changes, React re-renders the component automatically to reflect the new data.[</a:t>
-            </a:r>
-            <a:r>
-              <a:rPr lang="en-CA">
+              <a:rPr lang="en-CA" dirty="0"/>
+              <a:t>: When state changes, </a:t>
+            </a:r>
+            <a:r>
+              <a:rPr lang="en-CA" dirty="0">
+                <a:solidFill>
+                  <a:srgbClr val="FF0000"/>
+                </a:solidFill>
+              </a:rPr>
+              <a:t>React re-renders the component automatically to reflect the new data</a:t>
+            </a:r>
+            <a:r>
+              <a:rPr lang="en-CA" dirty="0"/>
+              <a:t>.[</a:t>
+            </a:r>
+            <a:r>
+              <a:rPr lang="en-CA" dirty="0">
                 <a:solidFill>
                   <a:srgbClr val="FFFF00"/>
                 </a:solidFill>
@@ -4313,31 +4375,31 @@
               <a:t>Re-rendering and http request</a:t>
             </a:r>
             <a:r>
-              <a:rPr lang="en-CA"/>
+              <a:rPr lang="en-CA" dirty="0"/>
               <a:t>]</a:t>
             </a:r>
           </a:p>
           <a:p>
-            <a:endParaRPr lang="en-CA"/>
-          </a:p>
-          <a:p>
-            <a:r>
-              <a:rPr lang="en-CA" b="1"/>
+            <a:endParaRPr lang="en-CA" dirty="0"/>
+          </a:p>
+          <a:p>
+            <a:r>
+              <a:rPr lang="en-CA" b="1" dirty="0"/>
               <a:t>Initialization and Update</a:t>
             </a:r>
             <a:r>
-              <a:rPr lang="en-CA"/>
+              <a:rPr lang="en-CA" dirty="0"/>
               <a:t>: State can be initialized when a component mounts and updated using functions like the </a:t>
             </a:r>
             <a:r>
-              <a:rPr lang="en-CA" err="1"/>
+              <a:rPr lang="en-CA" dirty="0" err="1"/>
               <a:t>useState</a:t>
             </a:r>
             <a:r>
-              <a:rPr lang="en-CA"/>
+              <a:rPr lang="en-CA" dirty="0"/>
               <a:t> Hook in functional components.</a:t>
             </a:r>
-            <a:endParaRPr lang="en-US"/>
+            <a:endParaRPr lang="en-US" dirty="0"/>
           </a:p>
         </p:txBody>
       </p:sp>
